--- a/pitch.pptx
+++ b/pitch.pptx
@@ -1,30 +1,130 @@
 
 <file path=ppt/presentation.xml><?xml version="1.0" encoding="utf-8"?>
-<p:presentation xmlns:a="http://schemas.openxmlformats.org/drawingml/2006/main" xmlns:p="http://schemas.openxmlformats.org/presentationml/2006/main" xmlns:r="http://schemas.openxmlformats.org/officeDocument/2006/relationships" xmlns:p14="http://schemas.microsoft.com/office/powerpoint/2010/main" xmlns:p15="http://schemas.microsoft.com/office/powerpoint/2012/main" xmlns:mc="http://schemas.openxmlformats.org/markup-compatibility/2006">
+<p:presentation xmlns:a="http://schemas.openxmlformats.org/drawingml/2006/main" xmlns:r="http://schemas.openxmlformats.org/officeDocument/2006/relationships" xmlns:p="http://schemas.openxmlformats.org/presentationml/2006/main">
   <p:sldMasterIdLst>
-    <p:sldMasterId id="2147483648" r:id="rId2"/>
+    <p:sldMasterId id="2147483648" r:id="rId1"/>
   </p:sldMasterIdLst>
   <p:sldIdLst>
-    <p:sldId id="256" r:id="rId3"/>
-    <p:sldId id="257" r:id="rId4"/>
-    <p:sldId id="258" r:id="rId5"/>
-    <p:sldId id="259" r:id="rId6"/>
-    <p:sldId id="260" r:id="rId7"/>
-    <p:sldId id="261" r:id="rId8"/>
+    <p:sldId id="256" r:id="rId2"/>
+    <p:sldId id="257" r:id="rId3"/>
+    <p:sldId id="259" r:id="rId4"/>
+    <p:sldId id="260" r:id="rId5"/>
+    <p:sldId id="261" r:id="rId6"/>
   </p:sldIdLst>
-  <p:sldSz cx="9144000" cy="5143500"/>
+  <p:sldSz cx="9144000" cy="5143500" type="screen16x9"/>
   <p:notesSz cx="7559675" cy="10691813"/>
+  <p:defaultTextStyle>
+    <a:defPPr>
+      <a:defRPr lang="fr-FR"/>
+    </a:defPPr>
+    <a:lvl1pPr marL="0" algn="l" defTabSz="914400" rtl="0" eaLnBrk="1" latinLnBrk="0" hangingPunct="1">
+      <a:defRPr sz="1800" kern="1200">
+        <a:solidFill>
+          <a:schemeClr val="tx1"/>
+        </a:solidFill>
+        <a:latin typeface="+mn-lt"/>
+        <a:ea typeface="+mn-ea"/>
+        <a:cs typeface="+mn-cs"/>
+      </a:defRPr>
+    </a:lvl1pPr>
+    <a:lvl2pPr marL="457200" algn="l" defTabSz="914400" rtl="0" eaLnBrk="1" latinLnBrk="0" hangingPunct="1">
+      <a:defRPr sz="1800" kern="1200">
+        <a:solidFill>
+          <a:schemeClr val="tx1"/>
+        </a:solidFill>
+        <a:latin typeface="+mn-lt"/>
+        <a:ea typeface="+mn-ea"/>
+        <a:cs typeface="+mn-cs"/>
+      </a:defRPr>
+    </a:lvl2pPr>
+    <a:lvl3pPr marL="914400" algn="l" defTabSz="914400" rtl="0" eaLnBrk="1" latinLnBrk="0" hangingPunct="1">
+      <a:defRPr sz="1800" kern="1200">
+        <a:solidFill>
+          <a:schemeClr val="tx1"/>
+        </a:solidFill>
+        <a:latin typeface="+mn-lt"/>
+        <a:ea typeface="+mn-ea"/>
+        <a:cs typeface="+mn-cs"/>
+      </a:defRPr>
+    </a:lvl3pPr>
+    <a:lvl4pPr marL="1371600" algn="l" defTabSz="914400" rtl="0" eaLnBrk="1" latinLnBrk="0" hangingPunct="1">
+      <a:defRPr sz="1800" kern="1200">
+        <a:solidFill>
+          <a:schemeClr val="tx1"/>
+        </a:solidFill>
+        <a:latin typeface="+mn-lt"/>
+        <a:ea typeface="+mn-ea"/>
+        <a:cs typeface="+mn-cs"/>
+      </a:defRPr>
+    </a:lvl4pPr>
+    <a:lvl5pPr marL="1828800" algn="l" defTabSz="914400" rtl="0" eaLnBrk="1" latinLnBrk="0" hangingPunct="1">
+      <a:defRPr sz="1800" kern="1200">
+        <a:solidFill>
+          <a:schemeClr val="tx1"/>
+        </a:solidFill>
+        <a:latin typeface="+mn-lt"/>
+        <a:ea typeface="+mn-ea"/>
+        <a:cs typeface="+mn-cs"/>
+      </a:defRPr>
+    </a:lvl5pPr>
+    <a:lvl6pPr marL="2286000" algn="l" defTabSz="914400" rtl="0" eaLnBrk="1" latinLnBrk="0" hangingPunct="1">
+      <a:defRPr sz="1800" kern="1200">
+        <a:solidFill>
+          <a:schemeClr val="tx1"/>
+        </a:solidFill>
+        <a:latin typeface="+mn-lt"/>
+        <a:ea typeface="+mn-ea"/>
+        <a:cs typeface="+mn-cs"/>
+      </a:defRPr>
+    </a:lvl6pPr>
+    <a:lvl7pPr marL="2743200" algn="l" defTabSz="914400" rtl="0" eaLnBrk="1" latinLnBrk="0" hangingPunct="1">
+      <a:defRPr sz="1800" kern="1200">
+        <a:solidFill>
+          <a:schemeClr val="tx1"/>
+        </a:solidFill>
+        <a:latin typeface="+mn-lt"/>
+        <a:ea typeface="+mn-ea"/>
+        <a:cs typeface="+mn-cs"/>
+      </a:defRPr>
+    </a:lvl7pPr>
+    <a:lvl8pPr marL="3200400" algn="l" defTabSz="914400" rtl="0" eaLnBrk="1" latinLnBrk="0" hangingPunct="1">
+      <a:defRPr sz="1800" kern="1200">
+        <a:solidFill>
+          <a:schemeClr val="tx1"/>
+        </a:solidFill>
+        <a:latin typeface="+mn-lt"/>
+        <a:ea typeface="+mn-ea"/>
+        <a:cs typeface="+mn-cs"/>
+      </a:defRPr>
+    </a:lvl8pPr>
+    <a:lvl9pPr marL="3657600" algn="l" defTabSz="914400" rtl="0" eaLnBrk="1" latinLnBrk="0" hangingPunct="1">
+      <a:defRPr sz="1800" kern="1200">
+        <a:solidFill>
+          <a:schemeClr val="tx1"/>
+        </a:solidFill>
+        <a:latin typeface="+mn-lt"/>
+        <a:ea typeface="+mn-ea"/>
+        <a:cs typeface="+mn-cs"/>
+      </a:defRPr>
+    </a:lvl9pPr>
+  </p:defaultTextStyle>
+  <p:extLst>
+    <p:ext uri="{EFAFB233-063F-42B5-8137-9DF3F51BA10A}">
+      <p15:sldGuideLst xmlns:p15="http://schemas.microsoft.com/office/powerpoint/2012/main"/>
+    </p:ext>
+  </p:extLst>
 </p:presentation>
 </file>
 
 <file path=ppt/slideLayouts/slideLayout1.xml><?xml version="1.0" encoding="utf-8"?>
-<p:sldLayout xmlns:a="http://schemas.openxmlformats.org/drawingml/2006/main" xmlns:p="http://schemas.openxmlformats.org/presentationml/2006/main" xmlns:r="http://schemas.openxmlformats.org/officeDocument/2006/relationships" xmlns:p14="http://schemas.microsoft.com/office/powerpoint/2010/main" xmlns:p15="http://schemas.microsoft.com/office/powerpoint/2012/main" xmlns:mc="http://schemas.openxmlformats.org/markup-compatibility/2006" type="blank" preserve="1">
+<p:sldLayout xmlns:a="http://schemas.openxmlformats.org/drawingml/2006/main" xmlns:r="http://schemas.openxmlformats.org/officeDocument/2006/relationships" xmlns:p="http://schemas.openxmlformats.org/presentationml/2006/main" type="blank" preserve="1">
   <p:cSld name="basic0">
     <p:bg>
       <p:bgPr>
         <a:solidFill>
           <a:srgbClr val="FFFFFF"/>
         </a:solidFill>
+        <a:effectLst/>
       </p:bgPr>
     </p:bg>
     <p:spTree>
@@ -96,14 +196,6 @@
               </a:rPr>
               <a:t>Click to edit the title text format</a:t>
             </a:r>
-            <a:endParaRPr lang="en-GB" sz="2800" b="0" u="none" strike="noStrike">
-              <a:solidFill>
-                <a:srgbClr val="000000"/>
-              </a:solidFill>
-              <a:effectLst/>
-              <a:uFillTx/>
-              <a:latin typeface="Arial"/>
-            </a:endParaRPr>
           </a:p>
         </p:txBody>
       </p:sp>
@@ -172,7 +264,7 @@
                 <a:latin typeface="Segoe UI"/>
                 <a:ea typeface="Arial"/>
               </a:rPr>
-              <a:t>5</a:t>
+              <a:t>‹N°›</a:t>
             </a:fld>
             <a:endParaRPr lang="en-GB" sz="1000" b="0" u="none" strike="noStrike">
               <a:solidFill>
@@ -209,17 +301,23 @@
           </a:ln>
         </p:spPr>
         <p:style>
-          <a:lnRef idx="0"/>
-          <a:fillRef idx="0"/>
-          <a:effectRef idx="0"/>
+          <a:lnRef idx="0">
+            <a:scrgbClr r="0" g="0" b="0"/>
+          </a:lnRef>
+          <a:fillRef idx="0">
+            <a:scrgbClr r="0" g="0" b="0"/>
+          </a:fillRef>
+          <a:effectRef idx="0">
+            <a:scrgbClr r="0" g="0" b="0"/>
+          </a:effectRef>
           <a:fontRef idx="minor"/>
         </p:style>
         <p:txBody>
           <a:bodyPr tIns="91440" bIns="91440" anchor="ctr">
             <a:noAutofit/>
           </a:bodyPr>
-          <a:p>
-            <a:pPr/>
+          <a:lstStyle/>
+          <a:p>
             <a:endParaRPr lang="en-GB" sz="1400" b="0" u="none" strike="noStrike">
               <a:solidFill>
                 <a:srgbClr val="000000"/>
@@ -407,14 +505,6 @@
               </a:rPr>
               <a:t>Click to edit the outline text format</a:t>
             </a:r>
-            <a:endParaRPr lang="en-GB" sz="1800" b="0" u="none" strike="noStrike">
-              <a:solidFill>
-                <a:srgbClr val="000000"/>
-              </a:solidFill>
-              <a:effectLst/>
-              <a:uFillTx/>
-              <a:latin typeface="Segoe UI"/>
-            </a:endParaRPr>
           </a:p>
           <a:p>
             <a:pPr marL="864000" lvl="1" indent="-324000" algn="l">
@@ -436,14 +526,6 @@
               </a:rPr>
               <a:t>Second Outline Level</a:t>
             </a:r>
-            <a:endParaRPr lang="en-GB" sz="1800" b="0" u="none" strike="noStrike">
-              <a:solidFill>
-                <a:srgbClr val="000000"/>
-              </a:solidFill>
-              <a:effectLst/>
-              <a:uFillTx/>
-              <a:latin typeface="Segoe UI"/>
-            </a:endParaRPr>
           </a:p>
           <a:p>
             <a:pPr marL="1296000" lvl="2" indent="-288000" algn="l">
@@ -468,14 +550,6 @@
               </a:rPr>
               <a:t>Third Outline Level</a:t>
             </a:r>
-            <a:endParaRPr lang="en-GB" sz="1400" b="0" u="none" strike="noStrike">
-              <a:solidFill>
-                <a:srgbClr val="000000"/>
-              </a:solidFill>
-              <a:effectLst/>
-              <a:uFillTx/>
-              <a:latin typeface="Arial"/>
-            </a:endParaRPr>
           </a:p>
           <a:p>
             <a:pPr marL="1728000" lvl="3" indent="-216000" algn="l">
@@ -500,14 +574,6 @@
               </a:rPr>
               <a:t>Fourth Outline Level</a:t>
             </a:r>
-            <a:endParaRPr lang="en-GB" sz="1400" b="0" u="none" strike="noStrike">
-              <a:solidFill>
-                <a:srgbClr val="000000"/>
-              </a:solidFill>
-              <a:effectLst/>
-              <a:uFillTx/>
-              <a:latin typeface="Arial"/>
-            </a:endParaRPr>
           </a:p>
           <a:p>
             <a:pPr marL="2160000" lvl="4" indent="-216000" algn="l">
@@ -532,14 +598,6 @@
               </a:rPr>
               <a:t>Fifth Outline Level</a:t>
             </a:r>
-            <a:endParaRPr lang="en-GB" sz="2000" b="0" u="none" strike="noStrike">
-              <a:solidFill>
-                <a:srgbClr val="000000"/>
-              </a:solidFill>
-              <a:effectLst/>
-              <a:uFillTx/>
-              <a:latin typeface="Arial"/>
-            </a:endParaRPr>
           </a:p>
           <a:p>
             <a:pPr marL="2592000" lvl="5" indent="-216000" algn="l">
@@ -564,14 +622,6 @@
               </a:rPr>
               <a:t>Sixth Outline Level</a:t>
             </a:r>
-            <a:endParaRPr lang="en-GB" sz="2000" b="0" u="none" strike="noStrike">
-              <a:solidFill>
-                <a:srgbClr val="000000"/>
-              </a:solidFill>
-              <a:effectLst/>
-              <a:uFillTx/>
-              <a:latin typeface="Arial"/>
-            </a:endParaRPr>
           </a:p>
           <a:p>
             <a:pPr marL="3024000" lvl="6" indent="-216000" algn="l">
@@ -596,14 +646,6 @@
               </a:rPr>
               <a:t>Seventh Outline Level</a:t>
             </a:r>
-            <a:endParaRPr lang="en-GB" sz="2000" b="0" u="none" strike="noStrike">
-              <a:solidFill>
-                <a:srgbClr val="000000"/>
-              </a:solidFill>
-              <a:effectLst/>
-              <a:uFillTx/>
-              <a:latin typeface="Arial"/>
-            </a:endParaRPr>
           </a:p>
         </p:txBody>
       </p:sp>
@@ -616,13 +658,14 @@
 </file>
 
 <file path=ppt/slideLayouts/slideLayout2.xml><?xml version="1.0" encoding="utf-8"?>
-<p:sldLayout xmlns:a="http://schemas.openxmlformats.org/drawingml/2006/main" xmlns:p="http://schemas.openxmlformats.org/presentationml/2006/main" xmlns:r="http://schemas.openxmlformats.org/officeDocument/2006/relationships" xmlns:p14="http://schemas.microsoft.com/office/powerpoint/2010/main" xmlns:p15="http://schemas.microsoft.com/office/powerpoint/2012/main" xmlns:mc="http://schemas.openxmlformats.org/markup-compatibility/2006" type="blank" preserve="1">
+<p:sldLayout xmlns:a="http://schemas.openxmlformats.org/drawingml/2006/main" xmlns:r="http://schemas.openxmlformats.org/officeDocument/2006/relationships" xmlns:p="http://schemas.openxmlformats.org/presentationml/2006/main" type="blank" preserve="1">
   <p:cSld name="master_title">
     <p:bg>
       <p:bgPr>
         <a:solidFill>
           <a:srgbClr val="FFFFFF"/>
         </a:solidFill>
+        <a:effectLst/>
       </p:bgPr>
     </p:bg>
     <p:spTree>
@@ -694,14 +737,6 @@
               </a:rPr>
               <a:t>Click to edit the title text format</a:t>
             </a:r>
-            <a:endParaRPr lang="en-GB" sz="3800" b="0" u="none" strike="noStrike">
-              <a:solidFill>
-                <a:srgbClr val="000000"/>
-              </a:solidFill>
-              <a:effectLst/>
-              <a:uFillTx/>
-              <a:latin typeface="Arial"/>
-            </a:endParaRPr>
           </a:p>
         </p:txBody>
       </p:sp>
@@ -770,7 +805,7 @@
                 <a:latin typeface="Segoe UI"/>
                 <a:ea typeface="Arial"/>
               </a:rPr>
-              <a:t>&lt;number&gt;</a:t>
+              <a:t>‹N°›</a:t>
             </a:fld>
             <a:endParaRPr lang="en-GB" sz="1000" b="0" u="none" strike="noStrike">
               <a:solidFill>
@@ -959,14 +994,6 @@
               </a:rPr>
               <a:t>Click to edit the outline text format</a:t>
             </a:r>
-            <a:endParaRPr lang="en-GB" sz="1800" b="0" u="none" strike="noStrike">
-              <a:solidFill>
-                <a:srgbClr val="000000"/>
-              </a:solidFill>
-              <a:effectLst/>
-              <a:uFillTx/>
-              <a:latin typeface="Segoe UI"/>
-            </a:endParaRPr>
           </a:p>
           <a:p>
             <a:pPr marL="882000" lvl="1" indent="-285840" algn="l">
@@ -988,14 +1015,6 @@
               </a:rPr>
               <a:t>Second Outline Level</a:t>
             </a:r>
-            <a:endParaRPr lang="en-GB" sz="1800" b="0" u="none" strike="noStrike">
-              <a:solidFill>
-                <a:srgbClr val="000000"/>
-              </a:solidFill>
-              <a:effectLst/>
-              <a:uFillTx/>
-              <a:latin typeface="Segoe UI"/>
-            </a:endParaRPr>
           </a:p>
           <a:p>
             <a:pPr marL="285840" lvl="2" indent="-285840" algn="l">
@@ -1020,14 +1039,6 @@
               </a:rPr>
               <a:t>Third Outline Level</a:t>
             </a:r>
-            <a:endParaRPr lang="en-GB" sz="1800" b="0" u="none" strike="noStrike">
-              <a:solidFill>
-                <a:srgbClr val="000000"/>
-              </a:solidFill>
-              <a:effectLst/>
-              <a:uFillTx/>
-              <a:latin typeface="Arial"/>
-            </a:endParaRPr>
           </a:p>
           <a:p>
             <a:pPr marL="285840" lvl="3" indent="-285840" algn="l">
@@ -1052,14 +1063,6 @@
               </a:rPr>
               <a:t>Fourth Outline Level</a:t>
             </a:r>
-            <a:endParaRPr lang="en-GB" sz="1800" b="0" u="none" strike="noStrike">
-              <a:solidFill>
-                <a:srgbClr val="000000"/>
-              </a:solidFill>
-              <a:effectLst/>
-              <a:uFillTx/>
-              <a:latin typeface="Arial"/>
-            </a:endParaRPr>
           </a:p>
           <a:p>
             <a:pPr marL="285840" lvl="4" indent="-285840" algn="l">
@@ -1084,14 +1087,6 @@
               </a:rPr>
               <a:t>Fifth Outline Level</a:t>
             </a:r>
-            <a:endParaRPr lang="en-GB" sz="1800" b="0" u="none" strike="noStrike">
-              <a:solidFill>
-                <a:srgbClr val="000000"/>
-              </a:solidFill>
-              <a:effectLst/>
-              <a:uFillTx/>
-              <a:latin typeface="Arial"/>
-            </a:endParaRPr>
           </a:p>
           <a:p>
             <a:pPr marL="2592000" lvl="5" indent="-216000" algn="l">
@@ -1116,14 +1111,6 @@
               </a:rPr>
               <a:t>Sixth Outline Level</a:t>
             </a:r>
-            <a:endParaRPr lang="en-GB" sz="1800" b="0" u="none" strike="noStrike">
-              <a:solidFill>
-                <a:srgbClr val="000000"/>
-              </a:solidFill>
-              <a:effectLst/>
-              <a:uFillTx/>
-              <a:latin typeface="Arial"/>
-            </a:endParaRPr>
           </a:p>
           <a:p>
             <a:pPr marL="3024000" lvl="6" indent="-216000" algn="l">
@@ -1148,14 +1135,6 @@
               </a:rPr>
               <a:t>Seventh Outline Level</a:t>
             </a:r>
-            <a:endParaRPr lang="en-GB" sz="1800" b="0" u="none" strike="noStrike">
-              <a:solidFill>
-                <a:srgbClr val="000000"/>
-              </a:solidFill>
-              <a:effectLst/>
-              <a:uFillTx/>
-              <a:latin typeface="Arial"/>
-            </a:endParaRPr>
           </a:p>
         </p:txBody>
       </p:sp>
@@ -1168,13 +1147,14 @@
 </file>
 
 <file path=ppt/slideLayouts/slideLayout3.xml><?xml version="1.0" encoding="utf-8"?>
-<p:sldLayout xmlns:a="http://schemas.openxmlformats.org/drawingml/2006/main" xmlns:p="http://schemas.openxmlformats.org/presentationml/2006/main" xmlns:r="http://schemas.openxmlformats.org/officeDocument/2006/relationships" xmlns:p14="http://schemas.microsoft.com/office/powerpoint/2010/main" xmlns:p15="http://schemas.microsoft.com/office/powerpoint/2012/main" xmlns:mc="http://schemas.openxmlformats.org/markup-compatibility/2006" type="blank" preserve="1">
+<p:sldLayout xmlns:a="http://schemas.openxmlformats.org/drawingml/2006/main" xmlns:r="http://schemas.openxmlformats.org/officeDocument/2006/relationships" xmlns:p="http://schemas.openxmlformats.org/presentationml/2006/main" type="blank" preserve="1">
   <p:cSld name="summary">
     <p:bg>
       <p:bgPr>
         <a:solidFill>
           <a:srgbClr val="FFFFFF"/>
         </a:solidFill>
+        <a:effectLst/>
       </p:bgPr>
     </p:bg>
     <p:spTree>
@@ -1252,14 +1232,6 @@
               </a:rPr>
               <a:t>Click to edit the title text format</a:t>
             </a:r>
-            <a:endParaRPr lang="en-GB" sz="2800" b="1" u="none" strike="noStrike">
-              <a:solidFill>
-                <a:schemeClr val="lt1"/>
-              </a:solidFill>
-              <a:effectLst/>
-              <a:uFillTx/>
-              <a:latin typeface="Segoe UI"/>
-            </a:endParaRPr>
           </a:p>
         </p:txBody>
       </p:sp>
@@ -1796,7 +1768,7 @@
                 <a:latin typeface="Segoe UI"/>
                 <a:ea typeface="Arial"/>
               </a:rPr>
-              <a:t>&lt;number&gt;</a:t>
+              <a:t>‹N°›</a:t>
             </a:fld>
             <a:endParaRPr lang="en-GB" sz="1000" b="0" u="none" strike="noStrike">
               <a:solidFill>
@@ -1833,17 +1805,23 @@
           </a:ln>
         </p:spPr>
         <p:style>
-          <a:lnRef idx="0"/>
-          <a:fillRef idx="0"/>
-          <a:effectRef idx="0"/>
+          <a:lnRef idx="0">
+            <a:scrgbClr r="0" g="0" b="0"/>
+          </a:lnRef>
+          <a:fillRef idx="0">
+            <a:scrgbClr r="0" g="0" b="0"/>
+          </a:fillRef>
+          <a:effectRef idx="0">
+            <a:scrgbClr r="0" g="0" b="0"/>
+          </a:effectRef>
           <a:fontRef idx="minor"/>
         </p:style>
         <p:txBody>
           <a:bodyPr tIns="91440" bIns="91440" anchor="ctr">
             <a:noAutofit/>
           </a:bodyPr>
-          <a:p>
-            <a:pPr/>
+          <a:lstStyle/>
+          <a:p>
             <a:endParaRPr lang="en-GB" sz="1400" b="0" u="none" strike="noStrike">
               <a:solidFill>
                 <a:srgbClr val="000000"/>
@@ -1864,13 +1842,14 @@
 </file>
 
 <file path=ppt/slideLayouts/slideLayout4.xml><?xml version="1.0" encoding="utf-8"?>
-<p:sldLayout xmlns:a="http://schemas.openxmlformats.org/drawingml/2006/main" xmlns:p="http://schemas.openxmlformats.org/presentationml/2006/main" xmlns:r="http://schemas.openxmlformats.org/officeDocument/2006/relationships" xmlns:p14="http://schemas.microsoft.com/office/powerpoint/2010/main" xmlns:p15="http://schemas.microsoft.com/office/powerpoint/2012/main" xmlns:mc="http://schemas.openxmlformats.org/markup-compatibility/2006" type="blank" preserve="1">
+<p:sldLayout xmlns:a="http://schemas.openxmlformats.org/drawingml/2006/main" xmlns:r="http://schemas.openxmlformats.org/officeDocument/2006/relationships" xmlns:p="http://schemas.openxmlformats.org/presentationml/2006/main" type="blank" preserve="1">
   <p:cSld name="title1">
     <p:bg>
       <p:bgPr>
         <a:solidFill>
           <a:srgbClr val="FFFFFF"/>
         </a:solidFill>
+        <a:effectLst/>
       </p:bgPr>
     </p:bg>
     <p:spTree>
@@ -2034,7 +2013,7 @@
                 <a:latin typeface="Segoe UI"/>
                 <a:ea typeface="Arial"/>
               </a:rPr>
-              <a:t>&lt;number&gt;</a:t>
+              <a:t>‹N°›</a:t>
             </a:fld>
             <a:endParaRPr lang="en-GB" sz="1000" b="0" u="none" strike="noStrike">
               <a:solidFill>
@@ -2071,17 +2050,23 @@
           </a:ln>
         </p:spPr>
         <p:style>
-          <a:lnRef idx="0"/>
-          <a:fillRef idx="0"/>
-          <a:effectRef idx="0"/>
+          <a:lnRef idx="0">
+            <a:scrgbClr r="0" g="0" b="0"/>
+          </a:lnRef>
+          <a:fillRef idx="0">
+            <a:scrgbClr r="0" g="0" b="0"/>
+          </a:fillRef>
+          <a:effectRef idx="0">
+            <a:scrgbClr r="0" g="0" b="0"/>
+          </a:effectRef>
           <a:fontRef idx="minor"/>
         </p:style>
         <p:txBody>
           <a:bodyPr tIns="91440" bIns="91440" anchor="ctr">
             <a:noAutofit/>
           </a:bodyPr>
-          <a:p>
-            <a:pPr/>
+          <a:lstStyle/>
+          <a:p>
             <a:endParaRPr lang="en-GB" sz="1400" b="0" u="none" strike="noStrike">
               <a:solidFill>
                 <a:srgbClr val="000000"/>
@@ -2148,14 +2133,6 @@
               </a:rPr>
               <a:t>Click to edit the title text format</a:t>
             </a:r>
-            <a:endParaRPr lang="en-GB" sz="3800" b="0" u="none" strike="noStrike">
-              <a:solidFill>
-                <a:srgbClr val="000000"/>
-              </a:solidFill>
-              <a:effectLst/>
-              <a:uFillTx/>
-              <a:latin typeface="Arial"/>
-            </a:endParaRPr>
           </a:p>
         </p:txBody>
       </p:sp>
@@ -2168,13 +2145,14 @@
 </file>
 
 <file path=ppt/slideLayouts/slideLayout5.xml><?xml version="1.0" encoding="utf-8"?>
-<p:sldLayout xmlns:a="http://schemas.openxmlformats.org/drawingml/2006/main" xmlns:p="http://schemas.openxmlformats.org/presentationml/2006/main" xmlns:r="http://schemas.openxmlformats.org/officeDocument/2006/relationships" xmlns:p14="http://schemas.microsoft.com/office/powerpoint/2010/main" xmlns:p15="http://schemas.microsoft.com/office/powerpoint/2012/main" xmlns:mc="http://schemas.openxmlformats.org/markup-compatibility/2006" type="blank" preserve="1">
+<p:sldLayout xmlns:a="http://schemas.openxmlformats.org/drawingml/2006/main" xmlns:r="http://schemas.openxmlformats.org/officeDocument/2006/relationships" xmlns:p="http://schemas.openxmlformats.org/presentationml/2006/main" type="blank" preserve="1">
   <p:cSld name="title2">
     <p:bg>
       <p:bgPr>
         <a:solidFill>
           <a:srgbClr val="FFFFFF"/>
         </a:solidFill>
+        <a:effectLst/>
       </p:bgPr>
     </p:bg>
     <p:spTree>
@@ -2338,7 +2316,7 @@
                 <a:latin typeface="Segoe UI"/>
                 <a:ea typeface="Arial"/>
               </a:rPr>
-              <a:t>&lt;number&gt;</a:t>
+              <a:t>‹N°›</a:t>
             </a:fld>
             <a:endParaRPr lang="en-GB" sz="1000" b="0" u="none" strike="noStrike">
               <a:solidFill>
@@ -2406,14 +2384,6 @@
               </a:rPr>
               <a:t>Click to edit the title text format</a:t>
             </a:r>
-            <a:endParaRPr lang="en-GB" sz="3800" b="0" u="none" strike="noStrike">
-              <a:solidFill>
-                <a:srgbClr val="000000"/>
-              </a:solidFill>
-              <a:effectLst/>
-              <a:uFillTx/>
-              <a:latin typeface="Arial"/>
-            </a:endParaRPr>
           </a:p>
         </p:txBody>
       </p:sp>
@@ -2441,17 +2411,23 @@
           </a:ln>
         </p:spPr>
         <p:style>
-          <a:lnRef idx="0"/>
-          <a:fillRef idx="0"/>
-          <a:effectRef idx="0"/>
+          <a:lnRef idx="0">
+            <a:scrgbClr r="0" g="0" b="0"/>
+          </a:lnRef>
+          <a:fillRef idx="0">
+            <a:scrgbClr r="0" g="0" b="0"/>
+          </a:fillRef>
+          <a:effectRef idx="0">
+            <a:scrgbClr r="0" g="0" b="0"/>
+          </a:effectRef>
           <a:fontRef idx="minor"/>
         </p:style>
         <p:txBody>
           <a:bodyPr tIns="91440" bIns="91440" anchor="ctr">
             <a:noAutofit/>
           </a:bodyPr>
-          <a:p>
-            <a:pPr/>
+          <a:lstStyle/>
+          <a:p>
             <a:endParaRPr lang="en-GB" sz="1400" b="0" u="none" strike="noStrike">
               <a:solidFill>
                 <a:srgbClr val="000000"/>
@@ -2472,13 +2448,14 @@
 </file>
 
 <file path=ppt/slideLayouts/slideLayout6.xml><?xml version="1.0" encoding="utf-8"?>
-<p:sldLayout xmlns:a="http://schemas.openxmlformats.org/drawingml/2006/main" xmlns:p="http://schemas.openxmlformats.org/presentationml/2006/main" xmlns:r="http://schemas.openxmlformats.org/officeDocument/2006/relationships" xmlns:p14="http://schemas.microsoft.com/office/powerpoint/2010/main" xmlns:p15="http://schemas.microsoft.com/office/powerpoint/2012/main" xmlns:mc="http://schemas.openxmlformats.org/markup-compatibility/2006" type="blank" preserve="1">
+<p:sldLayout xmlns:a="http://schemas.openxmlformats.org/drawingml/2006/main" xmlns:r="http://schemas.openxmlformats.org/officeDocument/2006/relationships" xmlns:p="http://schemas.openxmlformats.org/presentationml/2006/main" type="blank" preserve="1">
   <p:cSld name="title3">
     <p:bg>
       <p:bgPr>
         <a:solidFill>
           <a:srgbClr val="FFFFFF"/>
         </a:solidFill>
+        <a:effectLst/>
       </p:bgPr>
     </p:bg>
     <p:spTree>
@@ -2642,7 +2619,7 @@
                 <a:latin typeface="Segoe UI"/>
                 <a:ea typeface="Arial"/>
               </a:rPr>
-              <a:t>&lt;number&gt;</a:t>
+              <a:t>‹N°›</a:t>
             </a:fld>
             <a:endParaRPr lang="en-GB" sz="1000" b="0" u="none" strike="noStrike">
               <a:solidFill>
@@ -2710,14 +2687,6 @@
               </a:rPr>
               <a:t>Click to edit the title text format</a:t>
             </a:r>
-            <a:endParaRPr lang="en-GB" sz="3800" b="0" u="none" strike="noStrike">
-              <a:solidFill>
-                <a:srgbClr val="000000"/>
-              </a:solidFill>
-              <a:effectLst/>
-              <a:uFillTx/>
-              <a:latin typeface="Arial"/>
-            </a:endParaRPr>
           </a:p>
         </p:txBody>
       </p:sp>
@@ -2745,17 +2714,23 @@
           </a:ln>
         </p:spPr>
         <p:style>
-          <a:lnRef idx="0"/>
-          <a:fillRef idx="0"/>
-          <a:effectRef idx="0"/>
+          <a:lnRef idx="0">
+            <a:scrgbClr r="0" g="0" b="0"/>
+          </a:lnRef>
+          <a:fillRef idx="0">
+            <a:scrgbClr r="0" g="0" b="0"/>
+          </a:fillRef>
+          <a:effectRef idx="0">
+            <a:scrgbClr r="0" g="0" b="0"/>
+          </a:effectRef>
           <a:fontRef idx="minor"/>
         </p:style>
         <p:txBody>
           <a:bodyPr tIns="91440" bIns="91440" anchor="ctr">
             <a:noAutofit/>
           </a:bodyPr>
-          <a:p>
-            <a:pPr/>
+          <a:lstStyle/>
+          <a:p>
             <a:endParaRPr lang="en-GB" sz="1400" b="0" u="none" strike="noStrike">
               <a:solidFill>
                 <a:srgbClr val="000000"/>
@@ -2776,13 +2751,14 @@
 </file>
 
 <file path=ppt/slideLayouts/slideLayout7.xml><?xml version="1.0" encoding="utf-8"?>
-<p:sldLayout xmlns:a="http://schemas.openxmlformats.org/drawingml/2006/main" xmlns:p="http://schemas.openxmlformats.org/presentationml/2006/main" xmlns:r="http://schemas.openxmlformats.org/officeDocument/2006/relationships" xmlns:p14="http://schemas.microsoft.com/office/powerpoint/2010/main" xmlns:p15="http://schemas.microsoft.com/office/powerpoint/2012/main" xmlns:mc="http://schemas.openxmlformats.org/markup-compatibility/2006" type="blank" preserve="1">
+<p:sldLayout xmlns:a="http://schemas.openxmlformats.org/drawingml/2006/main" xmlns:r="http://schemas.openxmlformats.org/officeDocument/2006/relationships" xmlns:p="http://schemas.openxmlformats.org/presentationml/2006/main" type="blank" preserve="1">
   <p:cSld name="2_col">
     <p:bg>
       <p:bgPr>
         <a:solidFill>
           <a:srgbClr val="FFFFFF"/>
         </a:solidFill>
+        <a:effectLst/>
       </p:bgPr>
     </p:bg>
     <p:spTree>
@@ -2854,14 +2830,6 @@
               </a:rPr>
               <a:t>Click to edit the title text format</a:t>
             </a:r>
-            <a:endParaRPr lang="en-GB" sz="2800" b="0" u="none" strike="noStrike">
-              <a:solidFill>
-                <a:srgbClr val="000000"/>
-              </a:solidFill>
-              <a:effectLst/>
-              <a:uFillTx/>
-              <a:latin typeface="Arial"/>
-            </a:endParaRPr>
           </a:p>
         </p:txBody>
       </p:sp>
@@ -2930,7 +2898,7 @@
                 <a:latin typeface="Segoe UI"/>
                 <a:ea typeface="Arial"/>
               </a:rPr>
-              <a:t>&lt;number&gt;</a:t>
+              <a:t>‹N°›</a:t>
             </a:fld>
             <a:endParaRPr lang="en-GB" sz="1000" b="0" u="none" strike="noStrike">
               <a:solidFill>
@@ -2967,17 +2935,23 @@
           </a:ln>
         </p:spPr>
         <p:style>
-          <a:lnRef idx="0"/>
-          <a:fillRef idx="0"/>
-          <a:effectRef idx="0"/>
+          <a:lnRef idx="0">
+            <a:scrgbClr r="0" g="0" b="0"/>
+          </a:lnRef>
+          <a:fillRef idx="0">
+            <a:scrgbClr r="0" g="0" b="0"/>
+          </a:fillRef>
+          <a:effectRef idx="0">
+            <a:scrgbClr r="0" g="0" b="0"/>
+          </a:effectRef>
           <a:fontRef idx="minor"/>
         </p:style>
         <p:txBody>
           <a:bodyPr tIns="91440" bIns="91440" anchor="ctr">
             <a:noAutofit/>
           </a:bodyPr>
-          <a:p>
-            <a:pPr/>
+          <a:lstStyle/>
+          <a:p>
             <a:endParaRPr lang="en-GB" sz="1400" b="0" u="none" strike="noStrike">
               <a:solidFill>
                 <a:srgbClr val="000000"/>
@@ -2998,13 +2972,14 @@
 </file>
 
 <file path=ppt/slideLayouts/slideLayout8.xml><?xml version="1.0" encoding="utf-8"?>
-<p:sldLayout xmlns:a="http://schemas.openxmlformats.org/drawingml/2006/main" xmlns:p="http://schemas.openxmlformats.org/presentationml/2006/main" xmlns:r="http://schemas.openxmlformats.org/officeDocument/2006/relationships" xmlns:p14="http://schemas.microsoft.com/office/powerpoint/2010/main" xmlns:p15="http://schemas.microsoft.com/office/powerpoint/2012/main" xmlns:mc="http://schemas.openxmlformats.org/markup-compatibility/2006" type="blank" preserve="1">
+<p:sldLayout xmlns:a="http://schemas.openxmlformats.org/drawingml/2006/main" xmlns:r="http://schemas.openxmlformats.org/officeDocument/2006/relationships" xmlns:p="http://schemas.openxmlformats.org/presentationml/2006/main" type="blank" preserve="1">
   <p:cSld name="3_col">
     <p:bg>
       <p:bgPr>
         <a:solidFill>
           <a:srgbClr val="FFFFFF"/>
         </a:solidFill>
+        <a:effectLst/>
       </p:bgPr>
     </p:bg>
     <p:spTree>
@@ -3076,14 +3051,6 @@
               </a:rPr>
               <a:t>Click to edit the title text format</a:t>
             </a:r>
-            <a:endParaRPr lang="en-GB" sz="2800" b="0" u="none" strike="noStrike">
-              <a:solidFill>
-                <a:srgbClr val="000000"/>
-              </a:solidFill>
-              <a:effectLst/>
-              <a:uFillTx/>
-              <a:latin typeface="Arial"/>
-            </a:endParaRPr>
           </a:p>
         </p:txBody>
       </p:sp>
@@ -3152,7 +3119,7 @@
                 <a:latin typeface="Segoe UI"/>
                 <a:ea typeface="Arial"/>
               </a:rPr>
-              <a:t>&lt;number&gt;</a:t>
+              <a:t>‹N°›</a:t>
             </a:fld>
             <a:endParaRPr lang="en-GB" sz="1000" b="0" u="none" strike="noStrike">
               <a:solidFill>
@@ -3189,17 +3156,23 @@
           </a:ln>
         </p:spPr>
         <p:style>
-          <a:lnRef idx="0"/>
-          <a:fillRef idx="0"/>
-          <a:effectRef idx="0"/>
+          <a:lnRef idx="0">
+            <a:scrgbClr r="0" g="0" b="0"/>
+          </a:lnRef>
+          <a:fillRef idx="0">
+            <a:scrgbClr r="0" g="0" b="0"/>
+          </a:fillRef>
+          <a:effectRef idx="0">
+            <a:scrgbClr r="0" g="0" b="0"/>
+          </a:effectRef>
           <a:fontRef idx="minor"/>
         </p:style>
         <p:txBody>
           <a:bodyPr tIns="91440" bIns="91440" anchor="ctr">
             <a:noAutofit/>
           </a:bodyPr>
-          <a:p>
-            <a:pPr/>
+          <a:lstStyle/>
+          <a:p>
             <a:endParaRPr lang="en-GB" sz="1400" b="0" u="none" strike="noStrike">
               <a:solidFill>
                 <a:srgbClr val="000000"/>
@@ -3220,13 +3193,14 @@
 </file>
 
 <file path=ppt/slideLayouts/slideLayout9.xml><?xml version="1.0" encoding="utf-8"?>
-<p:sldLayout xmlns:a="http://schemas.openxmlformats.org/drawingml/2006/main" xmlns:p="http://schemas.openxmlformats.org/presentationml/2006/main" xmlns:r="http://schemas.openxmlformats.org/officeDocument/2006/relationships" xmlns:p14="http://schemas.microsoft.com/office/powerpoint/2010/main" xmlns:p15="http://schemas.microsoft.com/office/powerpoint/2012/main" xmlns:mc="http://schemas.openxmlformats.org/markup-compatibility/2006" type="blank" preserve="1">
+<p:sldLayout xmlns:a="http://schemas.openxmlformats.org/drawingml/2006/main" xmlns:r="http://schemas.openxmlformats.org/officeDocument/2006/relationships" xmlns:p="http://schemas.openxmlformats.org/presentationml/2006/main" type="blank" preserve="1">
   <p:cSld name="2_col_dbl">
     <p:bg>
       <p:bgPr>
         <a:solidFill>
           <a:srgbClr val="FFFFFF"/>
         </a:solidFill>
+        <a:effectLst/>
       </p:bgPr>
     </p:bg>
     <p:spTree>
@@ -3298,14 +3272,6 @@
               </a:rPr>
               <a:t>Click to edit the title text format</a:t>
             </a:r>
-            <a:endParaRPr lang="en-GB" sz="2800" b="0" u="none" strike="noStrike">
-              <a:solidFill>
-                <a:srgbClr val="000000"/>
-              </a:solidFill>
-              <a:effectLst/>
-              <a:uFillTx/>
-              <a:latin typeface="Arial"/>
-            </a:endParaRPr>
           </a:p>
         </p:txBody>
       </p:sp>
@@ -3374,7 +3340,7 @@
                 <a:latin typeface="Segoe UI"/>
                 <a:ea typeface="Arial"/>
               </a:rPr>
-              <a:t>&lt;number&gt;</a:t>
+              <a:t>‹N°›</a:t>
             </a:fld>
             <a:endParaRPr lang="en-GB" sz="1000" b="0" u="none" strike="noStrike">
               <a:solidFill>
@@ -3411,17 +3377,23 @@
           </a:ln>
         </p:spPr>
         <p:style>
-          <a:lnRef idx="0"/>
-          <a:fillRef idx="0"/>
-          <a:effectRef idx="0"/>
+          <a:lnRef idx="0">
+            <a:scrgbClr r="0" g="0" b="0"/>
+          </a:lnRef>
+          <a:fillRef idx="0">
+            <a:scrgbClr r="0" g="0" b="0"/>
+          </a:fillRef>
+          <a:effectRef idx="0">
+            <a:scrgbClr r="0" g="0" b="0"/>
+          </a:effectRef>
           <a:fontRef idx="minor"/>
         </p:style>
         <p:txBody>
           <a:bodyPr tIns="91440" bIns="91440" anchor="ctr">
             <a:noAutofit/>
           </a:bodyPr>
-          <a:p>
-            <a:pPr/>
+          <a:lstStyle/>
+          <a:p>
             <a:endParaRPr lang="en-GB" sz="1400" b="0" u="none" strike="noStrike">
               <a:solidFill>
                 <a:srgbClr val="000000"/>
@@ -3442,8 +3414,13 @@
 </file>
 
 <file path=ppt/slideMasters/slideMaster1.xml><?xml version="1.0" encoding="utf-8"?>
-<p:sldMaster xmlns:a="http://schemas.openxmlformats.org/drawingml/2006/main" xmlns:p="http://schemas.openxmlformats.org/presentationml/2006/main" xmlns:r="http://schemas.openxmlformats.org/officeDocument/2006/relationships" xmlns:p14="http://schemas.microsoft.com/office/powerpoint/2010/main" xmlns:p15="http://schemas.microsoft.com/office/powerpoint/2012/main" xmlns:mc="http://schemas.openxmlformats.org/markup-compatibility/2006">
+<p:sldMaster xmlns:a="http://schemas.openxmlformats.org/drawingml/2006/main" xmlns:r="http://schemas.openxmlformats.org/officeDocument/2006/relationships" xmlns:p="http://schemas.openxmlformats.org/presentationml/2006/main">
   <p:cSld>
+    <p:bg>
+      <p:bgRef idx="1001">
+        <a:schemeClr val="bg1"/>
+      </p:bgRef>
+    </p:bg>
     <p:spTree>
       <p:nvGrpSpPr>
         <p:cNvPr id="1" name=""/>
@@ -3462,21 +3439,301 @@
   </p:cSld>
   <p:clrMap bg1="lt1" tx1="dk1" bg2="dk2" tx2="lt2" accent1="accent1" accent2="accent2" accent3="accent3" accent4="accent4" accent5="accent5" accent6="accent6" hlink="hlink" folHlink="folHlink"/>
   <p:sldLayoutIdLst>
-    <p:sldLayoutId id="2147483649" r:id="rId2"/>
-    <p:sldLayoutId id="2147483650" r:id="rId3"/>
-    <p:sldLayoutId id="2147483651" r:id="rId4"/>
-    <p:sldLayoutId id="2147483652" r:id="rId5"/>
-    <p:sldLayoutId id="2147483653" r:id="rId6"/>
-    <p:sldLayoutId id="2147483654" r:id="rId7"/>
-    <p:sldLayoutId id="2147483655" r:id="rId8"/>
-    <p:sldLayoutId id="2147483656" r:id="rId9"/>
-    <p:sldLayoutId id="2147483657" r:id="rId10"/>
+    <p:sldLayoutId id="2147483649" r:id="rId1"/>
+    <p:sldLayoutId id="2147483650" r:id="rId2"/>
+    <p:sldLayoutId id="2147483651" r:id="rId3"/>
+    <p:sldLayoutId id="2147483652" r:id="rId4"/>
+    <p:sldLayoutId id="2147483653" r:id="rId5"/>
+    <p:sldLayoutId id="2147483654" r:id="rId6"/>
+    <p:sldLayoutId id="2147483655" r:id="rId7"/>
+    <p:sldLayoutId id="2147483656" r:id="rId8"/>
+    <p:sldLayoutId id="2147483657" r:id="rId9"/>
   </p:sldLayoutIdLst>
+  <p:txStyles>
+    <p:titleStyle>
+      <a:lvl1pPr algn="l" defTabSz="914400" rtl="0" eaLnBrk="1" latinLnBrk="0" hangingPunct="1">
+        <a:lnSpc>
+          <a:spcPct val="90000"/>
+        </a:lnSpc>
+        <a:spcBef>
+          <a:spcPct val="0"/>
+        </a:spcBef>
+        <a:buNone/>
+        <a:defRPr sz="4400" kern="1200">
+          <a:solidFill>
+            <a:schemeClr val="tx1"/>
+          </a:solidFill>
+          <a:latin typeface="+mj-lt"/>
+          <a:ea typeface="+mj-ea"/>
+          <a:cs typeface="+mj-cs"/>
+        </a:defRPr>
+      </a:lvl1pPr>
+    </p:titleStyle>
+    <p:bodyStyle>
+      <a:lvl1pPr marL="228600" indent="-228600" algn="l" defTabSz="914400" rtl="0" eaLnBrk="1" latinLnBrk="0" hangingPunct="1">
+        <a:lnSpc>
+          <a:spcPct val="90000"/>
+        </a:lnSpc>
+        <a:spcBef>
+          <a:spcPts val="1000"/>
+        </a:spcBef>
+        <a:buFont typeface="Arial" panose="020B0604020202020204" pitchFamily="34" charset="0"/>
+        <a:buChar char="•"/>
+        <a:defRPr sz="2800" kern="1200">
+          <a:solidFill>
+            <a:schemeClr val="tx1"/>
+          </a:solidFill>
+          <a:latin typeface="+mn-lt"/>
+          <a:ea typeface="+mn-ea"/>
+          <a:cs typeface="+mn-cs"/>
+        </a:defRPr>
+      </a:lvl1pPr>
+      <a:lvl2pPr marL="685800" indent="-228600" algn="l" defTabSz="914400" rtl="0" eaLnBrk="1" latinLnBrk="0" hangingPunct="1">
+        <a:lnSpc>
+          <a:spcPct val="90000"/>
+        </a:lnSpc>
+        <a:spcBef>
+          <a:spcPts val="500"/>
+        </a:spcBef>
+        <a:buFont typeface="Arial" panose="020B0604020202020204" pitchFamily="34" charset="0"/>
+        <a:buChar char="•"/>
+        <a:defRPr sz="2400" kern="1200">
+          <a:solidFill>
+            <a:schemeClr val="tx1"/>
+          </a:solidFill>
+          <a:latin typeface="+mn-lt"/>
+          <a:ea typeface="+mn-ea"/>
+          <a:cs typeface="+mn-cs"/>
+        </a:defRPr>
+      </a:lvl2pPr>
+      <a:lvl3pPr marL="1143000" indent="-228600" algn="l" defTabSz="914400" rtl="0" eaLnBrk="1" latinLnBrk="0" hangingPunct="1">
+        <a:lnSpc>
+          <a:spcPct val="90000"/>
+        </a:lnSpc>
+        <a:spcBef>
+          <a:spcPts val="500"/>
+        </a:spcBef>
+        <a:buFont typeface="Arial" panose="020B0604020202020204" pitchFamily="34" charset="0"/>
+        <a:buChar char="•"/>
+        <a:defRPr sz="2000" kern="1200">
+          <a:solidFill>
+            <a:schemeClr val="tx1"/>
+          </a:solidFill>
+          <a:latin typeface="+mn-lt"/>
+          <a:ea typeface="+mn-ea"/>
+          <a:cs typeface="+mn-cs"/>
+        </a:defRPr>
+      </a:lvl3pPr>
+      <a:lvl4pPr marL="1600200" indent="-228600" algn="l" defTabSz="914400" rtl="0" eaLnBrk="1" latinLnBrk="0" hangingPunct="1">
+        <a:lnSpc>
+          <a:spcPct val="90000"/>
+        </a:lnSpc>
+        <a:spcBef>
+          <a:spcPts val="500"/>
+        </a:spcBef>
+        <a:buFont typeface="Arial" panose="020B0604020202020204" pitchFamily="34" charset="0"/>
+        <a:buChar char="•"/>
+        <a:defRPr sz="1800" kern="1200">
+          <a:solidFill>
+            <a:schemeClr val="tx1"/>
+          </a:solidFill>
+          <a:latin typeface="+mn-lt"/>
+          <a:ea typeface="+mn-ea"/>
+          <a:cs typeface="+mn-cs"/>
+        </a:defRPr>
+      </a:lvl4pPr>
+      <a:lvl5pPr marL="2057400" indent="-228600" algn="l" defTabSz="914400" rtl="0" eaLnBrk="1" latinLnBrk="0" hangingPunct="1">
+        <a:lnSpc>
+          <a:spcPct val="90000"/>
+        </a:lnSpc>
+        <a:spcBef>
+          <a:spcPts val="500"/>
+        </a:spcBef>
+        <a:buFont typeface="Arial" panose="020B0604020202020204" pitchFamily="34" charset="0"/>
+        <a:buChar char="•"/>
+        <a:defRPr sz="1800" kern="1200">
+          <a:solidFill>
+            <a:schemeClr val="tx1"/>
+          </a:solidFill>
+          <a:latin typeface="+mn-lt"/>
+          <a:ea typeface="+mn-ea"/>
+          <a:cs typeface="+mn-cs"/>
+        </a:defRPr>
+      </a:lvl5pPr>
+      <a:lvl6pPr marL="2514600" indent="-228600" algn="l" defTabSz="914400" rtl="0" eaLnBrk="1" latinLnBrk="0" hangingPunct="1">
+        <a:lnSpc>
+          <a:spcPct val="90000"/>
+        </a:lnSpc>
+        <a:spcBef>
+          <a:spcPts val="500"/>
+        </a:spcBef>
+        <a:buFont typeface="Arial" panose="020B0604020202020204" pitchFamily="34" charset="0"/>
+        <a:buChar char="•"/>
+        <a:defRPr sz="1800" kern="1200">
+          <a:solidFill>
+            <a:schemeClr val="tx1"/>
+          </a:solidFill>
+          <a:latin typeface="+mn-lt"/>
+          <a:ea typeface="+mn-ea"/>
+          <a:cs typeface="+mn-cs"/>
+        </a:defRPr>
+      </a:lvl6pPr>
+      <a:lvl7pPr marL="2971800" indent="-228600" algn="l" defTabSz="914400" rtl="0" eaLnBrk="1" latinLnBrk="0" hangingPunct="1">
+        <a:lnSpc>
+          <a:spcPct val="90000"/>
+        </a:lnSpc>
+        <a:spcBef>
+          <a:spcPts val="500"/>
+        </a:spcBef>
+        <a:buFont typeface="Arial" panose="020B0604020202020204" pitchFamily="34" charset="0"/>
+        <a:buChar char="•"/>
+        <a:defRPr sz="1800" kern="1200">
+          <a:solidFill>
+            <a:schemeClr val="tx1"/>
+          </a:solidFill>
+          <a:latin typeface="+mn-lt"/>
+          <a:ea typeface="+mn-ea"/>
+          <a:cs typeface="+mn-cs"/>
+        </a:defRPr>
+      </a:lvl7pPr>
+      <a:lvl8pPr marL="3429000" indent="-228600" algn="l" defTabSz="914400" rtl="0" eaLnBrk="1" latinLnBrk="0" hangingPunct="1">
+        <a:lnSpc>
+          <a:spcPct val="90000"/>
+        </a:lnSpc>
+        <a:spcBef>
+          <a:spcPts val="500"/>
+        </a:spcBef>
+        <a:buFont typeface="Arial" panose="020B0604020202020204" pitchFamily="34" charset="0"/>
+        <a:buChar char="•"/>
+        <a:defRPr sz="1800" kern="1200">
+          <a:solidFill>
+            <a:schemeClr val="tx1"/>
+          </a:solidFill>
+          <a:latin typeface="+mn-lt"/>
+          <a:ea typeface="+mn-ea"/>
+          <a:cs typeface="+mn-cs"/>
+        </a:defRPr>
+      </a:lvl8pPr>
+      <a:lvl9pPr marL="3886200" indent="-228600" algn="l" defTabSz="914400" rtl="0" eaLnBrk="1" latinLnBrk="0" hangingPunct="1">
+        <a:lnSpc>
+          <a:spcPct val="90000"/>
+        </a:lnSpc>
+        <a:spcBef>
+          <a:spcPts val="500"/>
+        </a:spcBef>
+        <a:buFont typeface="Arial" panose="020B0604020202020204" pitchFamily="34" charset="0"/>
+        <a:buChar char="•"/>
+        <a:defRPr sz="1800" kern="1200">
+          <a:solidFill>
+            <a:schemeClr val="tx1"/>
+          </a:solidFill>
+          <a:latin typeface="+mn-lt"/>
+          <a:ea typeface="+mn-ea"/>
+          <a:cs typeface="+mn-cs"/>
+        </a:defRPr>
+      </a:lvl9pPr>
+    </p:bodyStyle>
+    <p:otherStyle>
+      <a:defPPr>
+        <a:defRPr lang="fr-FR"/>
+      </a:defPPr>
+      <a:lvl1pPr marL="0" algn="l" defTabSz="914400" rtl="0" eaLnBrk="1" latinLnBrk="0" hangingPunct="1">
+        <a:defRPr sz="1800" kern="1200">
+          <a:solidFill>
+            <a:schemeClr val="tx1"/>
+          </a:solidFill>
+          <a:latin typeface="+mn-lt"/>
+          <a:ea typeface="+mn-ea"/>
+          <a:cs typeface="+mn-cs"/>
+        </a:defRPr>
+      </a:lvl1pPr>
+      <a:lvl2pPr marL="457200" algn="l" defTabSz="914400" rtl="0" eaLnBrk="1" latinLnBrk="0" hangingPunct="1">
+        <a:defRPr sz="1800" kern="1200">
+          <a:solidFill>
+            <a:schemeClr val="tx1"/>
+          </a:solidFill>
+          <a:latin typeface="+mn-lt"/>
+          <a:ea typeface="+mn-ea"/>
+          <a:cs typeface="+mn-cs"/>
+        </a:defRPr>
+      </a:lvl2pPr>
+      <a:lvl3pPr marL="914400" algn="l" defTabSz="914400" rtl="0" eaLnBrk="1" latinLnBrk="0" hangingPunct="1">
+        <a:defRPr sz="1800" kern="1200">
+          <a:solidFill>
+            <a:schemeClr val="tx1"/>
+          </a:solidFill>
+          <a:latin typeface="+mn-lt"/>
+          <a:ea typeface="+mn-ea"/>
+          <a:cs typeface="+mn-cs"/>
+        </a:defRPr>
+      </a:lvl3pPr>
+      <a:lvl4pPr marL="1371600" algn="l" defTabSz="914400" rtl="0" eaLnBrk="1" latinLnBrk="0" hangingPunct="1">
+        <a:defRPr sz="1800" kern="1200">
+          <a:solidFill>
+            <a:schemeClr val="tx1"/>
+          </a:solidFill>
+          <a:latin typeface="+mn-lt"/>
+          <a:ea typeface="+mn-ea"/>
+          <a:cs typeface="+mn-cs"/>
+        </a:defRPr>
+      </a:lvl4pPr>
+      <a:lvl5pPr marL="1828800" algn="l" defTabSz="914400" rtl="0" eaLnBrk="1" latinLnBrk="0" hangingPunct="1">
+        <a:defRPr sz="1800" kern="1200">
+          <a:solidFill>
+            <a:schemeClr val="tx1"/>
+          </a:solidFill>
+          <a:latin typeface="+mn-lt"/>
+          <a:ea typeface="+mn-ea"/>
+          <a:cs typeface="+mn-cs"/>
+        </a:defRPr>
+      </a:lvl5pPr>
+      <a:lvl6pPr marL="2286000" algn="l" defTabSz="914400" rtl="0" eaLnBrk="1" latinLnBrk="0" hangingPunct="1">
+        <a:defRPr sz="1800" kern="1200">
+          <a:solidFill>
+            <a:schemeClr val="tx1"/>
+          </a:solidFill>
+          <a:latin typeface="+mn-lt"/>
+          <a:ea typeface="+mn-ea"/>
+          <a:cs typeface="+mn-cs"/>
+        </a:defRPr>
+      </a:lvl6pPr>
+      <a:lvl7pPr marL="2743200" algn="l" defTabSz="914400" rtl="0" eaLnBrk="1" latinLnBrk="0" hangingPunct="1">
+        <a:defRPr sz="1800" kern="1200">
+          <a:solidFill>
+            <a:schemeClr val="tx1"/>
+          </a:solidFill>
+          <a:latin typeface="+mn-lt"/>
+          <a:ea typeface="+mn-ea"/>
+          <a:cs typeface="+mn-cs"/>
+        </a:defRPr>
+      </a:lvl7pPr>
+      <a:lvl8pPr marL="3200400" algn="l" defTabSz="914400" rtl="0" eaLnBrk="1" latinLnBrk="0" hangingPunct="1">
+        <a:defRPr sz="1800" kern="1200">
+          <a:solidFill>
+            <a:schemeClr val="tx1"/>
+          </a:solidFill>
+          <a:latin typeface="+mn-lt"/>
+          <a:ea typeface="+mn-ea"/>
+          <a:cs typeface="+mn-cs"/>
+        </a:defRPr>
+      </a:lvl8pPr>
+      <a:lvl9pPr marL="3657600" algn="l" defTabSz="914400" rtl="0" eaLnBrk="1" latinLnBrk="0" hangingPunct="1">
+        <a:defRPr sz="1800" kern="1200">
+          <a:solidFill>
+            <a:schemeClr val="tx1"/>
+          </a:solidFill>
+          <a:latin typeface="+mn-lt"/>
+          <a:ea typeface="+mn-ea"/>
+          <a:cs typeface="+mn-cs"/>
+        </a:defRPr>
+      </a:lvl9pPr>
+    </p:otherStyle>
+  </p:txStyles>
 </p:sldMaster>
 </file>
 
 <file path=ppt/slides/slide1.xml><?xml version="1.0" encoding="utf-8"?>
-<p:sld xmlns:a="http://schemas.openxmlformats.org/drawingml/2006/main" xmlns:p="http://schemas.openxmlformats.org/presentationml/2006/main" xmlns:r="http://schemas.openxmlformats.org/officeDocument/2006/relationships" xmlns:p14="http://schemas.microsoft.com/office/powerpoint/2010/main" xmlns:p15="http://schemas.microsoft.com/office/powerpoint/2012/main" xmlns:mc="http://schemas.openxmlformats.org/markup-compatibility/2006">
+<p:sld xmlns:a="http://schemas.openxmlformats.org/drawingml/2006/main" xmlns:r="http://schemas.openxmlformats.org/officeDocument/2006/relationships" xmlns:p="http://schemas.openxmlformats.org/presentationml/2006/main">
   <p:cSld>
     <p:spTree>
       <p:nvGrpSpPr>
@@ -3519,6 +3776,7 @@
           <a:bodyPr lIns="91440" tIns="45720" rIns="91440" bIns="45720" anchor="t">
             <a:normAutofit lnSpcReduction="9999"/>
           </a:bodyPr>
+          <a:lstStyle/>
           <a:p>
             <a:pPr indent="0" algn="ctr">
               <a:lnSpc>
@@ -3559,7 +3817,7 @@
           <p:nvPr/>
         </p:nvPicPr>
         <p:blipFill>
-          <a:blip r:embed="rId1"/>
+          <a:blip r:embed="rId2"/>
           <a:stretch/>
         </p:blipFill>
         <p:spPr>
@@ -3589,28 +3847,26 @@
         <p:spPr/>
         <p:txBody>
           <a:bodyPr/>
+          <a:lstStyle/>
           <a:p>
             <a:fld id="{545679E5-54B7-483B-8378-6A10DE525E2E}" type="slidenum">
+              <a:rPr/>
               <a:t>1</a:t>
             </a:fld>
+            <a:endParaRPr/>
           </a:p>
         </p:txBody>
       </p:sp>
     </p:spTree>
   </p:cSld>
-  <mc:AlternateContent>
-    <mc:Choice Requires="p14">
-      <p:transition spd="slow" p14:dur="2000"/>
-    </mc:Choice>
-    <mc:Fallback>
-      <p:transition spd="slow"/>
-    </mc:Fallback>
-  </mc:AlternateContent>
+  <p:clrMapOvr>
+    <a:masterClrMapping/>
+  </p:clrMapOvr>
 </p:sld>
 </file>
 
 <file path=ppt/slides/slide2.xml><?xml version="1.0" encoding="utf-8"?>
-<p:sld xmlns:a="http://schemas.openxmlformats.org/drawingml/2006/main" xmlns:p="http://schemas.openxmlformats.org/presentationml/2006/main" xmlns:r="http://schemas.openxmlformats.org/officeDocument/2006/relationships" xmlns:p14="http://schemas.microsoft.com/office/powerpoint/2010/main" xmlns:p15="http://schemas.microsoft.com/office/powerpoint/2012/main" xmlns:mc="http://schemas.openxmlformats.org/markup-compatibility/2006">
+<p:sld xmlns:a="http://schemas.openxmlformats.org/drawingml/2006/main" xmlns:r="http://schemas.openxmlformats.org/officeDocument/2006/relationships" xmlns:p="http://schemas.openxmlformats.org/presentationml/2006/main">
   <p:cSld>
     <p:spTree>
       <p:nvGrpSpPr>
@@ -3633,7 +3889,7 @@
           <p:nvPr/>
         </p:nvPicPr>
         <p:blipFill>
-          <a:blip r:embed="rId1"/>
+          <a:blip r:embed="rId2"/>
           <a:stretch/>
         </p:blipFill>
         <p:spPr>
@@ -3659,7 +3915,7 @@
           <p:nvPr/>
         </p:nvPicPr>
         <p:blipFill>
-          <a:blip r:embed="rId2"/>
+          <a:blip r:embed="rId3"/>
           <a:stretch/>
         </p:blipFill>
         <p:spPr>
@@ -3705,7 +3961,7 @@
               </a:gs>
             </a:gsLst>
             <a:path path="circle">
-              <a:fillToRect l="0" t="0" r="100000" b="100000"/>
+              <a:fillToRect r="100000" b="100000"/>
             </a:path>
           </a:gradFill>
           <a:ln>
@@ -3730,8 +3986,8 @@
           <a:bodyPr lIns="90000" tIns="45000" rIns="90000" bIns="45000" anchor="ctr">
             <a:noAutofit/>
           </a:bodyPr>
-          <a:p>
-            <a:pPr/>
+          <a:lstStyle/>
+          <a:p>
             <a:endParaRPr lang="en-GB" sz="1400" b="0" u="none" strike="noStrike">
               <a:solidFill>
                 <a:schemeClr val="lt1"/>
@@ -3770,7 +4026,7 @@
               </a:gs>
             </a:gsLst>
             <a:path path="circle">
-              <a:fillToRect l="0" t="0" r="100000" b="100000"/>
+              <a:fillToRect r="100000" b="100000"/>
             </a:path>
           </a:gradFill>
           <a:ln>
@@ -3795,8 +4051,8 @@
           <a:bodyPr lIns="90000" tIns="45000" rIns="90000" bIns="45000" anchor="ctr">
             <a:noAutofit/>
           </a:bodyPr>
-          <a:p>
-            <a:pPr/>
+          <a:lstStyle/>
+          <a:p>
             <a:endParaRPr lang="en-GB" sz="1400" b="0" u="none" strike="noStrike">
               <a:solidFill>
                 <a:schemeClr val="lt1"/>
@@ -3821,28 +4077,26 @@
         <p:spPr/>
         <p:txBody>
           <a:bodyPr/>
+          <a:lstStyle/>
           <a:p>
             <a:fld id="{6D960C9D-F41A-4336-A424-36DF766A677D}" type="slidenum">
+              <a:rPr/>
               <a:t>2</a:t>
             </a:fld>
+            <a:endParaRPr/>
           </a:p>
         </p:txBody>
       </p:sp>
     </p:spTree>
   </p:cSld>
-  <mc:AlternateContent>
-    <mc:Choice Requires="p14">
-      <p:transition spd="slow" p14:dur="2000"/>
-    </mc:Choice>
-    <mc:Fallback>
-      <p:transition spd="slow"/>
-    </mc:Fallback>
-  </mc:AlternateContent>
+  <p:clrMapOvr>
+    <a:masterClrMapping/>
+  </p:clrMapOvr>
 </p:sld>
 </file>
 
 <file path=ppt/slides/slide3.xml><?xml version="1.0" encoding="utf-8"?>
-<p:sld xmlns:a="http://schemas.openxmlformats.org/drawingml/2006/main" xmlns:p="http://schemas.openxmlformats.org/presentationml/2006/main" xmlns:r="http://schemas.openxmlformats.org/officeDocument/2006/relationships" xmlns:p14="http://schemas.microsoft.com/office/powerpoint/2010/main" xmlns:p15="http://schemas.microsoft.com/office/powerpoint/2012/main" xmlns:mc="http://schemas.openxmlformats.org/markup-compatibility/2006" show="0">
+<p:sld xmlns:a="http://schemas.openxmlformats.org/drawingml/2006/main" xmlns:r="http://schemas.openxmlformats.org/officeDocument/2006/relationships" xmlns:p="http://schemas.openxmlformats.org/presentationml/2006/main">
   <p:cSld>
     <p:spTree>
       <p:nvGrpSpPr>
@@ -3860,31 +4114,7 @@
       </p:grpSpPr>
       <p:pic>
         <p:nvPicPr>
-          <p:cNvPr id="45" name=""/>
-          <p:cNvPicPr/>
-          <p:nvPr/>
-        </p:nvPicPr>
-        <p:blipFill>
-          <a:blip r:embed="rId1"/>
-          <a:stretch/>
-        </p:blipFill>
-        <p:spPr>
-          <a:xfrm>
-            <a:off x="4722480" y="2573280"/>
-            <a:ext cx="1181520" cy="2534400"/>
-          </a:xfrm>
-          <a:prstGeom prst="rect">
-            <a:avLst/>
-          </a:prstGeom>
-          <a:noFill/>
-          <a:ln w="38160">
-            <a:noFill/>
-          </a:ln>
-        </p:spPr>
-      </p:pic>
-      <p:pic>
-        <p:nvPicPr>
-          <p:cNvPr id="46" name=""/>
+          <p:cNvPr id="67" name="Image 66"/>
           <p:cNvPicPr/>
           <p:nvPr/>
         </p:nvPicPr>
@@ -3894,8 +4124,8 @@
         </p:blipFill>
         <p:spPr>
           <a:xfrm>
-            <a:off x="3168000" y="2587680"/>
-            <a:ext cx="1223280" cy="2520000"/>
+            <a:off x="8007840" y="180000"/>
+            <a:ext cx="812160" cy="1697040"/>
           </a:xfrm>
           <a:prstGeom prst="rect">
             <a:avLst/>
@@ -3908,7 +4138,7 @@
       </p:pic>
       <p:pic>
         <p:nvPicPr>
-          <p:cNvPr id="47" name=""/>
+          <p:cNvPr id="68" name="Image 67"/>
           <p:cNvPicPr/>
           <p:nvPr/>
         </p:nvPicPr>
@@ -3918,8 +4148,8 @@
         </p:blipFill>
         <p:spPr>
           <a:xfrm>
-            <a:off x="1656000" y="2587680"/>
-            <a:ext cx="1222920" cy="2520000"/>
+            <a:off x="6867360" y="189720"/>
+            <a:ext cx="840600" cy="1687320"/>
           </a:xfrm>
           <a:prstGeom prst="rect">
             <a:avLst/>
@@ -3932,7 +4162,7 @@
       </p:pic>
       <p:pic>
         <p:nvPicPr>
-          <p:cNvPr id="48" name=""/>
+          <p:cNvPr id="69" name="Image 68"/>
           <p:cNvPicPr/>
           <p:nvPr/>
         </p:nvPicPr>
@@ -3942,8 +4172,8 @@
         </p:blipFill>
         <p:spPr>
           <a:xfrm>
-            <a:off x="180000" y="2587680"/>
-            <a:ext cx="1223640" cy="2520000"/>
+            <a:off x="5719680" y="189720"/>
+            <a:ext cx="840600" cy="1687320"/>
           </a:xfrm>
           <a:prstGeom prst="rect">
             <a:avLst/>
@@ -3956,7 +4186,7 @@
       </p:pic>
       <p:pic>
         <p:nvPicPr>
-          <p:cNvPr id="49" name=""/>
+          <p:cNvPr id="70" name="Image 69"/>
           <p:cNvPicPr/>
           <p:nvPr/>
         </p:nvPicPr>
@@ -3966,8 +4196,8 @@
         </p:blipFill>
         <p:spPr>
           <a:xfrm>
-            <a:off x="4715640" y="0"/>
-            <a:ext cx="1224360" cy="2522160"/>
+            <a:off x="4596840" y="189720"/>
+            <a:ext cx="841320" cy="1687320"/>
           </a:xfrm>
           <a:prstGeom prst="rect">
             <a:avLst/>
@@ -3980,7 +4210,7 @@
       </p:pic>
       <p:pic>
         <p:nvPicPr>
-          <p:cNvPr id="50" name=""/>
+          <p:cNvPr id="71" name="Image 70"/>
           <p:cNvPicPr/>
           <p:nvPr/>
         </p:nvPicPr>
@@ -3990,8 +4220,8 @@
         </p:blipFill>
         <p:spPr>
           <a:xfrm>
-            <a:off x="3168000" y="0"/>
-            <a:ext cx="1223280" cy="2520000"/>
+            <a:off x="3478320" y="144000"/>
+            <a:ext cx="841680" cy="1688760"/>
           </a:xfrm>
           <a:prstGeom prst="rect">
             <a:avLst/>
@@ -4004,7 +4234,7 @@
       </p:pic>
       <p:pic>
         <p:nvPicPr>
-          <p:cNvPr id="51" name=""/>
+          <p:cNvPr id="72" name="Image 71"/>
           <p:cNvPicPr/>
           <p:nvPr/>
         </p:nvPicPr>
@@ -4014,8 +4244,8 @@
         </p:blipFill>
         <p:spPr>
           <a:xfrm>
-            <a:off x="1656000" y="0"/>
-            <a:ext cx="1175040" cy="2520000"/>
+            <a:off x="2378520" y="144000"/>
+            <a:ext cx="840600" cy="1687320"/>
           </a:xfrm>
           <a:prstGeom prst="rect">
             <a:avLst/>
@@ -4028,7 +4258,7 @@
       </p:pic>
       <p:pic>
         <p:nvPicPr>
-          <p:cNvPr id="52" name=""/>
+          <p:cNvPr id="73" name="Image 72"/>
           <p:cNvPicPr/>
           <p:nvPr/>
         </p:nvPicPr>
@@ -4038,8 +4268,8 @@
         </p:blipFill>
         <p:spPr>
           <a:xfrm>
-            <a:off x="180000" y="2160"/>
-            <a:ext cx="1175040" cy="2520000"/>
+            <a:off x="1302840" y="144000"/>
+            <a:ext cx="807840" cy="1687320"/>
           </a:xfrm>
           <a:prstGeom prst="rect">
             <a:avLst/>
@@ -4052,7 +4282,7 @@
       </p:pic>
       <p:pic>
         <p:nvPicPr>
-          <p:cNvPr id="53" name=""/>
+          <p:cNvPr id="74" name="Image 73"/>
           <p:cNvPicPr/>
           <p:nvPr/>
         </p:nvPicPr>
@@ -4062,8 +4292,8 @@
         </p:blipFill>
         <p:spPr>
           <a:xfrm>
-            <a:off x="6228000" y="1080000"/>
-            <a:ext cx="1315440" cy="2700000"/>
+            <a:off x="216000" y="145440"/>
+            <a:ext cx="807840" cy="1687320"/>
           </a:xfrm>
           <a:prstGeom prst="rect">
             <a:avLst/>
@@ -4076,7 +4306,7 @@
       </p:pic>
       <p:pic>
         <p:nvPicPr>
-          <p:cNvPr id="54" name=""/>
+          <p:cNvPr id="75" name="Image 74"/>
           <p:cNvPicPr/>
           <p:nvPr/>
         </p:nvPicPr>
@@ -4086,8 +4316,32 @@
         </p:blipFill>
         <p:spPr>
           <a:xfrm>
-            <a:off x="7776000" y="1080000"/>
-            <a:ext cx="1315800" cy="2700000"/>
+            <a:off x="540000" y="2700000"/>
+            <a:ext cx="942480" cy="1800000"/>
+          </a:xfrm>
+          <a:prstGeom prst="rect">
+            <a:avLst/>
+          </a:prstGeom>
+          <a:noFill/>
+          <a:ln w="38160">
+            <a:noFill/>
+          </a:ln>
+        </p:spPr>
+      </p:pic>
+      <p:pic>
+        <p:nvPicPr>
+          <p:cNvPr id="76" name="Image 75"/>
+          <p:cNvPicPr/>
+          <p:nvPr/>
+        </p:nvPicPr>
+        <p:blipFill>
+          <a:blip r:embed="rId11"/>
+          <a:stretch/>
+        </p:blipFill>
+        <p:spPr>
+          <a:xfrm>
+            <a:off x="1829160" y="2700000"/>
+            <a:ext cx="942840" cy="1800000"/>
           </a:xfrm>
           <a:prstGeom prst="rect">
             <a:avLst/>
@@ -4100,145 +4354,13 @@
       </p:pic>
       <p:sp>
         <p:nvSpPr>
-          <p:cNvPr id="55" name=""/>
+          <p:cNvPr id="77" name="Right Arrow 15"/>
           <p:cNvSpPr/>
           <p:nvPr/>
         </p:nvSpPr>
         <p:spPr>
           <a:xfrm>
-            <a:off x="6120000" y="0"/>
-            <a:ext cx="0" cy="5400000"/>
-          </a:xfrm>
-          <a:prstGeom prst="line">
-            <a:avLst/>
-          </a:prstGeom>
-          <a:ln w="38160">
-            <a:solidFill>
-              <a:srgbClr val="000000"/>
-            </a:solidFill>
-            <a:round/>
-          </a:ln>
-        </p:spPr>
-        <p:style>
-          <a:lnRef idx="0"/>
-          <a:fillRef idx="0"/>
-          <a:effectRef idx="0"/>
-          <a:fontRef idx="minor"/>
-        </p:style>
-        <p:txBody>
-          <a:bodyPr lIns="90000" tIns="45000" rIns="90000" bIns="45000" anchor="ctr">
-            <a:noAutofit/>
-          </a:bodyPr>
-          <a:p>
-            <a:pPr/>
-            <a:endParaRPr lang="en-GB" sz="1800" b="0" u="none" strike="noStrike">
-              <a:solidFill>
-                <a:srgbClr val="FFFFFF"/>
-              </a:solidFill>
-              <a:effectLst/>
-              <a:uFillTx/>
-              <a:latin typeface="Noto Sans"/>
-            </a:endParaRPr>
-          </a:p>
-        </p:txBody>
-      </p:sp>
-      <p:sp>
-        <p:nvSpPr>
-          <p:cNvPr id="56" name=""/>
-          <p:cNvSpPr/>
-          <p:nvPr/>
-        </p:nvSpPr>
-        <p:spPr>
-          <a:xfrm flipV="1">
-            <a:off x="4680000" y="2700000"/>
-            <a:ext cx="1188000" cy="2340000"/>
-          </a:xfrm>
-          <a:prstGeom prst="line">
-            <a:avLst/>
-          </a:prstGeom>
-          <a:ln w="38160">
-            <a:solidFill>
-              <a:srgbClr val="FF4000"/>
-            </a:solidFill>
-            <a:round/>
-          </a:ln>
-        </p:spPr>
-        <p:style>
-          <a:lnRef idx="0"/>
-          <a:fillRef idx="0"/>
-          <a:effectRef idx="0"/>
-          <a:fontRef idx="minor"/>
-        </p:style>
-        <p:txBody>
-          <a:bodyPr lIns="90000" tIns="45000" rIns="90000" bIns="45000" anchor="ctr">
-            <a:noAutofit/>
-          </a:bodyPr>
-          <a:p>
-            <a:pPr/>
-            <a:endParaRPr lang="en-GB" sz="1800" b="0" u="none" strike="noStrike">
-              <a:solidFill>
-                <a:srgbClr val="000000"/>
-              </a:solidFill>
-              <a:effectLst/>
-              <a:uFillTx/>
-              <a:latin typeface="Noto Sans"/>
-            </a:endParaRPr>
-          </a:p>
-        </p:txBody>
-      </p:sp>
-      <p:sp>
-        <p:nvSpPr>
-          <p:cNvPr id="57" name=""/>
-          <p:cNvSpPr/>
-          <p:nvPr/>
-        </p:nvSpPr>
-        <p:spPr>
-          <a:xfrm flipH="1" flipV="1">
-            <a:off x="4680000" y="2700000"/>
-            <a:ext cx="1188000" cy="2340000"/>
-          </a:xfrm>
-          <a:prstGeom prst="line">
-            <a:avLst/>
-          </a:prstGeom>
-          <a:ln w="38160">
-            <a:solidFill>
-              <a:srgbClr val="FF4000"/>
-            </a:solidFill>
-            <a:round/>
-          </a:ln>
-        </p:spPr>
-        <p:style>
-          <a:lnRef idx="0"/>
-          <a:fillRef idx="0"/>
-          <a:effectRef idx="0"/>
-          <a:fontRef idx="minor"/>
-        </p:style>
-        <p:txBody>
-          <a:bodyPr lIns="90000" tIns="45000" rIns="90000" bIns="45000" anchor="ctr">
-            <a:noAutofit/>
-          </a:bodyPr>
-          <a:p>
-            <a:pPr/>
-            <a:endParaRPr lang="en-GB" sz="1800" b="0" u="none" strike="noStrike">
-              <a:solidFill>
-                <a:srgbClr val="000000"/>
-              </a:solidFill>
-              <a:effectLst/>
-              <a:uFillTx/>
-              <a:latin typeface="Noto Sans"/>
-            </a:endParaRPr>
-          </a:p>
-        </p:txBody>
-      </p:sp>
-      <p:sp>
-        <p:nvSpPr>
-          <p:cNvPr id="58" name="Right Arrow 2"/>
-          <p:cNvSpPr/>
-          <p:nvPr/>
-        </p:nvSpPr>
-        <p:spPr>
-          <a:xfrm>
-            <a:off x="1415160" y="1260000"/>
+            <a:off x="1554480" y="3477960"/>
             <a:ext cx="204840" cy="158040"/>
           </a:xfrm>
           <a:prstGeom prst="rightArrow">
@@ -4257,7 +4379,7 @@
               </a:gs>
             </a:gsLst>
             <a:path path="circle">
-              <a:fillToRect l="0" t="0" r="100000" b="100000"/>
+              <a:fillToRect r="100000" b="100000"/>
             </a:path>
           </a:gradFill>
           <a:ln>
@@ -4282,8 +4404,8 @@
           <a:bodyPr lIns="90000" tIns="34200" rIns="90000" bIns="34200" anchor="ctr">
             <a:noAutofit/>
           </a:bodyPr>
-          <a:p>
-            <a:pPr/>
+          <a:lstStyle/>
+          <a:p>
             <a:endParaRPr lang="en-GB" sz="1400" b="0" u="none" strike="noStrike">
               <a:solidFill>
                 <a:schemeClr val="lt1"/>
@@ -4297,13 +4419,13 @@
       </p:sp>
       <p:sp>
         <p:nvSpPr>
-          <p:cNvPr id="59" name="Right Arrow 3"/>
+          <p:cNvPr id="78" name="Right Arrow 16"/>
           <p:cNvSpPr/>
           <p:nvPr/>
         </p:nvSpPr>
         <p:spPr>
           <a:xfrm>
-            <a:off x="2891520" y="1282320"/>
+            <a:off x="1055160" y="828000"/>
             <a:ext cx="204840" cy="158040"/>
           </a:xfrm>
           <a:prstGeom prst="rightArrow">
@@ -4322,7 +4444,7 @@
               </a:gs>
             </a:gsLst>
             <a:path path="circle">
-              <a:fillToRect l="0" t="0" r="100000" b="100000"/>
+              <a:fillToRect r="100000" b="100000"/>
             </a:path>
           </a:gradFill>
           <a:ln>
@@ -4347,8 +4469,8 @@
           <a:bodyPr lIns="90000" tIns="34200" rIns="90000" bIns="34200" anchor="ctr">
             <a:noAutofit/>
           </a:bodyPr>
-          <a:p>
-            <a:pPr/>
+          <a:lstStyle/>
+          <a:p>
             <a:endParaRPr lang="en-GB" sz="1400" b="0" u="none" strike="noStrike">
               <a:solidFill>
                 <a:schemeClr val="lt1"/>
@@ -4362,13 +4484,69 @@
       </p:sp>
       <p:sp>
         <p:nvSpPr>
-          <p:cNvPr id="60" name="Right Arrow 4"/>
+          <p:cNvPr id="79" name="Content Placeholder 2"/>
+          <p:cNvSpPr txBox="1"/>
+          <p:nvPr/>
+        </p:nvSpPr>
+        <p:spPr>
+          <a:xfrm>
+            <a:off x="3240000" y="2530800"/>
+            <a:ext cx="5760000" cy="1429200"/>
+          </a:xfrm>
+          <a:prstGeom prst="rect">
+            <a:avLst/>
+          </a:prstGeom>
+          <a:noFill/>
+          <a:ln w="0">
+            <a:noFill/>
+          </a:ln>
+        </p:spPr>
+        <p:txBody>
+          <a:bodyPr anchor="t">
+            <a:normAutofit/>
+          </a:bodyPr>
+          <a:lstStyle/>
+          <a:p>
+            <a:pPr algn="ctr">
+              <a:lnSpc>
+                <a:spcPct val="100000"/>
+              </a:lnSpc>
+              <a:tabLst>
+                <a:tab pos="0" algn="l"/>
+              </a:tabLst>
+            </a:pPr>
+            <a:r>
+              <a:rPr lang="en-GB" sz="6600" b="1" u="none" strike="noStrike">
+                <a:solidFill>
+                  <a:srgbClr val="000000"/>
+                </a:solidFill>
+                <a:effectLst/>
+                <a:uFillTx/>
+                <a:latin typeface="Segoe UI"/>
+                <a:ea typeface="Segoe UI"/>
+              </a:rPr>
+              <a:t>7 CLICKS VS 1</a:t>
+            </a:r>
+            <a:endParaRPr lang="en-GB" sz="6600" b="1" u="none" strike="noStrike">
+              <a:solidFill>
+                <a:srgbClr val="000000"/>
+              </a:solidFill>
+              <a:effectLst/>
+              <a:uFillTx/>
+              <a:latin typeface="Segoe UI"/>
+            </a:endParaRPr>
+          </a:p>
+        </p:txBody>
+      </p:sp>
+      <p:sp>
+        <p:nvSpPr>
+          <p:cNvPr id="80" name="Right Arrow 10"/>
           <p:cNvSpPr/>
           <p:nvPr/>
         </p:nvSpPr>
         <p:spPr>
           <a:xfrm>
-            <a:off x="4439160" y="1281960"/>
+            <a:off x="2135160" y="849960"/>
             <a:ext cx="204840" cy="158040"/>
           </a:xfrm>
           <a:prstGeom prst="rightArrow">
@@ -4387,7 +4565,7 @@
               </a:gs>
             </a:gsLst>
             <a:path path="circle">
-              <a:fillToRect l="0" t="0" r="100000" b="100000"/>
+              <a:fillToRect r="100000" b="100000"/>
             </a:path>
           </a:gradFill>
           <a:ln>
@@ -4412,8 +4590,8 @@
           <a:bodyPr lIns="90000" tIns="34200" rIns="90000" bIns="34200" anchor="ctr">
             <a:noAutofit/>
           </a:bodyPr>
-          <a:p>
-            <a:pPr/>
+          <a:lstStyle/>
+          <a:p>
             <a:endParaRPr lang="en-GB" sz="1400" b="0" u="none" strike="noStrike">
               <a:solidFill>
                 <a:schemeClr val="lt1"/>
@@ -4427,13 +4605,13 @@
       </p:sp>
       <p:sp>
         <p:nvSpPr>
-          <p:cNvPr id="61" name="Right Arrow 5"/>
+          <p:cNvPr id="81" name="Right Arrow 11"/>
           <p:cNvSpPr/>
           <p:nvPr/>
         </p:nvSpPr>
         <p:spPr>
           <a:xfrm>
-            <a:off x="1440000" y="3780000"/>
+            <a:off x="3240000" y="849960"/>
             <a:ext cx="204840" cy="158040"/>
           </a:xfrm>
           <a:prstGeom prst="rightArrow">
@@ -4452,7 +4630,7 @@
               </a:gs>
             </a:gsLst>
             <a:path path="circle">
-              <a:fillToRect l="0" t="0" r="100000" b="100000"/>
+              <a:fillToRect r="100000" b="100000"/>
             </a:path>
           </a:gradFill>
           <a:ln>
@@ -4477,8 +4655,8 @@
           <a:bodyPr lIns="90000" tIns="34200" rIns="90000" bIns="34200" anchor="ctr">
             <a:noAutofit/>
           </a:bodyPr>
-          <a:p>
-            <a:pPr/>
+          <a:lstStyle/>
+          <a:p>
             <a:endParaRPr lang="en-GB" sz="1400" b="0" u="none" strike="noStrike">
               <a:solidFill>
                 <a:schemeClr val="lt1"/>
@@ -4492,13 +4670,13 @@
       </p:sp>
       <p:sp>
         <p:nvSpPr>
-          <p:cNvPr id="62" name="Right Arrow 6"/>
+          <p:cNvPr id="82" name="Right Arrow 12"/>
           <p:cNvSpPr/>
           <p:nvPr/>
         </p:nvSpPr>
         <p:spPr>
           <a:xfrm>
-            <a:off x="2916000" y="3780000"/>
+            <a:off x="4356000" y="864000"/>
             <a:ext cx="204840" cy="158040"/>
           </a:xfrm>
           <a:prstGeom prst="rightArrow">
@@ -4517,7 +4695,7 @@
               </a:gs>
             </a:gsLst>
             <a:path path="circle">
-              <a:fillToRect l="0" t="0" r="100000" b="100000"/>
+              <a:fillToRect r="100000" b="100000"/>
             </a:path>
           </a:gradFill>
           <a:ln>
@@ -4542,8 +4720,8 @@
           <a:bodyPr lIns="90000" tIns="34200" rIns="90000" bIns="34200" anchor="ctr">
             <a:noAutofit/>
           </a:bodyPr>
-          <a:p>
-            <a:pPr/>
+          <a:lstStyle/>
+          <a:p>
             <a:endParaRPr lang="en-GB" sz="1400" b="0" u="none" strike="noStrike">
               <a:solidFill>
                 <a:schemeClr val="lt1"/>
@@ -4557,13 +4735,13 @@
       </p:sp>
       <p:sp>
         <p:nvSpPr>
-          <p:cNvPr id="63" name="Right Arrow 7"/>
+          <p:cNvPr id="83" name="Right Arrow 13"/>
           <p:cNvSpPr/>
           <p:nvPr/>
         </p:nvSpPr>
         <p:spPr>
           <a:xfrm>
-            <a:off x="4464000" y="3780000"/>
+            <a:off x="5478840" y="864000"/>
             <a:ext cx="204840" cy="158040"/>
           </a:xfrm>
           <a:prstGeom prst="rightArrow">
@@ -4582,7 +4760,7 @@
               </a:gs>
             </a:gsLst>
             <a:path path="circle">
-              <a:fillToRect l="0" t="0" r="100000" b="100000"/>
+              <a:fillToRect r="100000" b="100000"/>
             </a:path>
           </a:gradFill>
           <a:ln>
@@ -4607,8 +4785,8 @@
           <a:bodyPr lIns="90000" tIns="34200" rIns="90000" bIns="34200" anchor="ctr">
             <a:noAutofit/>
           </a:bodyPr>
-          <a:p>
-            <a:pPr/>
+          <a:lstStyle/>
+          <a:p>
             <a:endParaRPr lang="en-GB" sz="1400" b="0" u="none" strike="noStrike">
               <a:solidFill>
                 <a:schemeClr val="lt1"/>
@@ -4622,13 +4800,13 @@
       </p:sp>
       <p:sp>
         <p:nvSpPr>
-          <p:cNvPr id="64" name="Right Arrow 8"/>
+          <p:cNvPr id="84" name="Right Arrow 14"/>
           <p:cNvSpPr/>
           <p:nvPr/>
         </p:nvSpPr>
         <p:spPr>
           <a:xfrm>
-            <a:off x="7571160" y="2361960"/>
+            <a:off x="6622560" y="870120"/>
             <a:ext cx="204840" cy="158040"/>
           </a:xfrm>
           <a:prstGeom prst="rightArrow">
@@ -4647,7 +4825,7 @@
               </a:gs>
             </a:gsLst>
             <a:path path="circle">
-              <a:fillToRect l="0" t="0" r="100000" b="100000"/>
+              <a:fillToRect r="100000" b="100000"/>
             </a:path>
           </a:gradFill>
           <a:ln>
@@ -4672,8 +4850,8 @@
           <a:bodyPr lIns="90000" tIns="34200" rIns="90000" bIns="34200" anchor="ctr">
             <a:noAutofit/>
           </a:bodyPr>
-          <a:p>
-            <a:pPr/>
+          <a:lstStyle/>
+          <a:p>
             <a:endParaRPr lang="en-GB" sz="1400" b="0" u="none" strike="noStrike">
               <a:solidFill>
                 <a:schemeClr val="lt1"/>
@@ -4687,393 +4865,13 @@
       </p:sp>
       <p:sp>
         <p:nvSpPr>
-          <p:cNvPr id="65" name="Content Placeholder 1"/>
-          <p:cNvSpPr txBox="1"/>
-          <p:nvPr/>
-        </p:nvSpPr>
-        <p:spPr>
-          <a:xfrm>
-            <a:off x="6552000" y="360000"/>
-            <a:ext cx="2160000" cy="349200"/>
-          </a:xfrm>
-          <a:prstGeom prst="rect">
-            <a:avLst/>
-          </a:prstGeom>
-          <a:noFill/>
-          <a:ln w="0">
-            <a:noFill/>
-          </a:ln>
-        </p:spPr>
-        <p:txBody>
-          <a:bodyPr anchor="t">
-            <a:normAutofit lnSpcReduction="9999"/>
-          </a:bodyPr>
-          <a:p>
-            <a:pPr algn="ctr">
-              <a:lnSpc>
-                <a:spcPct val="100000"/>
-              </a:lnSpc>
-              <a:tabLst>
-                <a:tab pos="0" algn="l"/>
-              </a:tabLst>
-            </a:pPr>
-            <a:r>
-              <a:rPr lang="en-GB" sz="1800" b="0" u="none" strike="noStrike">
-                <a:solidFill>
-                  <a:srgbClr val="000000"/>
-                </a:solidFill>
-                <a:effectLst/>
-                <a:uFillTx/>
-                <a:latin typeface="Segoe UI"/>
-                <a:ea typeface="Segoe UI"/>
-              </a:rPr>
-              <a:t>Enhanced version</a:t>
-            </a:r>
-            <a:endParaRPr lang="en-GB" sz="1800" b="0" u="none" strike="noStrike">
-              <a:solidFill>
-                <a:srgbClr val="000000"/>
-              </a:solidFill>
-              <a:effectLst/>
-              <a:uFillTx/>
-              <a:latin typeface="Segoe UI"/>
-            </a:endParaRPr>
-          </a:p>
-        </p:txBody>
-      </p:sp>
-      <p:sp>
-        <p:nvSpPr>
-          <p:cNvPr id="66" name="Content Placeholder 2"/>
-          <p:cNvSpPr txBox="1"/>
-          <p:nvPr/>
-        </p:nvSpPr>
-        <p:spPr>
-          <a:xfrm>
-            <a:off x="6300000" y="4140000"/>
-            <a:ext cx="2700000" cy="889200"/>
-          </a:xfrm>
-          <a:prstGeom prst="rect">
-            <a:avLst/>
-          </a:prstGeom>
-          <a:noFill/>
-          <a:ln w="0">
-            <a:noFill/>
-          </a:ln>
-        </p:spPr>
-        <p:txBody>
-          <a:bodyPr anchor="t">
-            <a:normAutofit fontScale="77500" lnSpcReduction="19999"/>
-          </a:bodyPr>
-          <a:p>
-            <a:pPr algn="ctr">
-              <a:lnSpc>
-                <a:spcPct val="100000"/>
-              </a:lnSpc>
-              <a:tabLst>
-                <a:tab pos="0" algn="l"/>
-              </a:tabLst>
-            </a:pPr>
-            <a:r>
-              <a:rPr lang="en-GB" sz="4000" b="0" u="none" strike="noStrike">
-                <a:solidFill>
-                  <a:srgbClr val="000000"/>
-                </a:solidFill>
-                <a:effectLst/>
-                <a:uFillTx/>
-                <a:latin typeface="Segoe UI"/>
-                <a:ea typeface="Segoe UI"/>
-              </a:rPr>
-              <a:t>7 CLICKS VS 1</a:t>
-            </a:r>
-            <a:endParaRPr lang="en-GB" sz="4000" b="0" u="none" strike="noStrike">
-              <a:solidFill>
-                <a:srgbClr val="000000"/>
-              </a:solidFill>
-              <a:effectLst/>
-              <a:uFillTx/>
-              <a:latin typeface="Segoe UI"/>
-            </a:endParaRPr>
-          </a:p>
-        </p:txBody>
-      </p:sp>
-    </p:spTree>
-  </p:cSld>
-  <mc:AlternateContent>
-    <mc:Choice Requires="p14">
-      <p:transition spd="slow" p14:dur="2000"/>
-    </mc:Choice>
-    <mc:Fallback>
-      <p:transition spd="slow"/>
-    </mc:Fallback>
-  </mc:AlternateContent>
-</p:sld>
-</file>
-
-<file path=ppt/slides/slide4.xml><?xml version="1.0" encoding="utf-8"?>
-<p:sld xmlns:a="http://schemas.openxmlformats.org/drawingml/2006/main" xmlns:p="http://schemas.openxmlformats.org/presentationml/2006/main" xmlns:r="http://schemas.openxmlformats.org/officeDocument/2006/relationships" xmlns:p14="http://schemas.microsoft.com/office/powerpoint/2010/main" xmlns:p15="http://schemas.microsoft.com/office/powerpoint/2012/main" xmlns:mc="http://schemas.openxmlformats.org/markup-compatibility/2006">
-  <p:cSld>
-    <p:spTree>
-      <p:nvGrpSpPr>
-        <p:cNvPr id="1" name=""/>
-        <p:cNvGrpSpPr/>
-        <p:nvPr/>
-      </p:nvGrpSpPr>
-      <p:grpSpPr>
-        <a:xfrm>
-          <a:off x="0" y="0"/>
-          <a:ext cx="0" cy="0"/>
-          <a:chOff x="0" y="0"/>
-          <a:chExt cx="0" cy="0"/>
-        </a:xfrm>
-      </p:grpSpPr>
-      <p:pic>
-        <p:nvPicPr>
-          <p:cNvPr id="67" name=""/>
-          <p:cNvPicPr/>
-          <p:nvPr/>
-        </p:nvPicPr>
-        <p:blipFill>
-          <a:blip r:embed="rId1"/>
-          <a:stretch/>
-        </p:blipFill>
-        <p:spPr>
-          <a:xfrm>
-            <a:off x="8007840" y="180000"/>
-            <a:ext cx="812160" cy="1697040"/>
-          </a:xfrm>
-          <a:prstGeom prst="rect">
-            <a:avLst/>
-          </a:prstGeom>
-          <a:noFill/>
-          <a:ln w="38160">
-            <a:noFill/>
-          </a:ln>
-        </p:spPr>
-      </p:pic>
-      <p:pic>
-        <p:nvPicPr>
-          <p:cNvPr id="68" name=""/>
-          <p:cNvPicPr/>
-          <p:nvPr/>
-        </p:nvPicPr>
-        <p:blipFill>
-          <a:blip r:embed="rId2"/>
-          <a:stretch/>
-        </p:blipFill>
-        <p:spPr>
-          <a:xfrm>
-            <a:off x="6867360" y="189720"/>
-            <a:ext cx="840600" cy="1687320"/>
-          </a:xfrm>
-          <a:prstGeom prst="rect">
-            <a:avLst/>
-          </a:prstGeom>
-          <a:noFill/>
-          <a:ln w="38160">
-            <a:noFill/>
-          </a:ln>
-        </p:spPr>
-      </p:pic>
-      <p:pic>
-        <p:nvPicPr>
-          <p:cNvPr id="69" name=""/>
-          <p:cNvPicPr/>
-          <p:nvPr/>
-        </p:nvPicPr>
-        <p:blipFill>
-          <a:blip r:embed="rId3"/>
-          <a:stretch/>
-        </p:blipFill>
-        <p:spPr>
-          <a:xfrm>
-            <a:off x="5719680" y="189720"/>
-            <a:ext cx="840600" cy="1687320"/>
-          </a:xfrm>
-          <a:prstGeom prst="rect">
-            <a:avLst/>
-          </a:prstGeom>
-          <a:noFill/>
-          <a:ln w="38160">
-            <a:noFill/>
-          </a:ln>
-        </p:spPr>
-      </p:pic>
-      <p:pic>
-        <p:nvPicPr>
-          <p:cNvPr id="70" name=""/>
-          <p:cNvPicPr/>
-          <p:nvPr/>
-        </p:nvPicPr>
-        <p:blipFill>
-          <a:blip r:embed="rId4"/>
-          <a:stretch/>
-        </p:blipFill>
-        <p:spPr>
-          <a:xfrm>
-            <a:off x="4596840" y="189720"/>
-            <a:ext cx="841320" cy="1687320"/>
-          </a:xfrm>
-          <a:prstGeom prst="rect">
-            <a:avLst/>
-          </a:prstGeom>
-          <a:noFill/>
-          <a:ln w="38160">
-            <a:noFill/>
-          </a:ln>
-        </p:spPr>
-      </p:pic>
-      <p:pic>
-        <p:nvPicPr>
-          <p:cNvPr id="71" name=""/>
-          <p:cNvPicPr/>
-          <p:nvPr/>
-        </p:nvPicPr>
-        <p:blipFill>
-          <a:blip r:embed="rId5"/>
-          <a:stretch/>
-        </p:blipFill>
-        <p:spPr>
-          <a:xfrm>
-            <a:off x="3478320" y="144000"/>
-            <a:ext cx="841680" cy="1688760"/>
-          </a:xfrm>
-          <a:prstGeom prst="rect">
-            <a:avLst/>
-          </a:prstGeom>
-          <a:noFill/>
-          <a:ln w="38160">
-            <a:noFill/>
-          </a:ln>
-        </p:spPr>
-      </p:pic>
-      <p:pic>
-        <p:nvPicPr>
-          <p:cNvPr id="72" name=""/>
-          <p:cNvPicPr/>
-          <p:nvPr/>
-        </p:nvPicPr>
-        <p:blipFill>
-          <a:blip r:embed="rId6"/>
-          <a:stretch/>
-        </p:blipFill>
-        <p:spPr>
-          <a:xfrm>
-            <a:off x="2378520" y="144000"/>
-            <a:ext cx="840600" cy="1687320"/>
-          </a:xfrm>
-          <a:prstGeom prst="rect">
-            <a:avLst/>
-          </a:prstGeom>
-          <a:noFill/>
-          <a:ln w="38160">
-            <a:noFill/>
-          </a:ln>
-        </p:spPr>
-      </p:pic>
-      <p:pic>
-        <p:nvPicPr>
-          <p:cNvPr id="73" name=""/>
-          <p:cNvPicPr/>
-          <p:nvPr/>
-        </p:nvPicPr>
-        <p:blipFill>
-          <a:blip r:embed="rId7"/>
-          <a:stretch/>
-        </p:blipFill>
-        <p:spPr>
-          <a:xfrm>
-            <a:off x="1302840" y="144000"/>
-            <a:ext cx="807840" cy="1687320"/>
-          </a:xfrm>
-          <a:prstGeom prst="rect">
-            <a:avLst/>
-          </a:prstGeom>
-          <a:noFill/>
-          <a:ln w="38160">
-            <a:noFill/>
-          </a:ln>
-        </p:spPr>
-      </p:pic>
-      <p:pic>
-        <p:nvPicPr>
-          <p:cNvPr id="74" name=""/>
-          <p:cNvPicPr/>
-          <p:nvPr/>
-        </p:nvPicPr>
-        <p:blipFill>
-          <a:blip r:embed="rId8"/>
-          <a:stretch/>
-        </p:blipFill>
-        <p:spPr>
-          <a:xfrm>
-            <a:off x="216000" y="145440"/>
-            <a:ext cx="807840" cy="1687320"/>
-          </a:xfrm>
-          <a:prstGeom prst="rect">
-            <a:avLst/>
-          </a:prstGeom>
-          <a:noFill/>
-          <a:ln w="38160">
-            <a:noFill/>
-          </a:ln>
-        </p:spPr>
-      </p:pic>
-      <p:pic>
-        <p:nvPicPr>
-          <p:cNvPr id="75" name=""/>
-          <p:cNvPicPr/>
-          <p:nvPr/>
-        </p:nvPicPr>
-        <p:blipFill>
-          <a:blip r:embed="rId9"/>
-          <a:stretch/>
-        </p:blipFill>
-        <p:spPr>
-          <a:xfrm>
-            <a:off x="540000" y="2700000"/>
-            <a:ext cx="942480" cy="1800000"/>
-          </a:xfrm>
-          <a:prstGeom prst="rect">
-            <a:avLst/>
-          </a:prstGeom>
-          <a:noFill/>
-          <a:ln w="38160">
-            <a:noFill/>
-          </a:ln>
-        </p:spPr>
-      </p:pic>
-      <p:pic>
-        <p:nvPicPr>
-          <p:cNvPr id="76" name=""/>
-          <p:cNvPicPr/>
-          <p:nvPr/>
-        </p:nvPicPr>
-        <p:blipFill>
-          <a:blip r:embed="rId10"/>
-          <a:stretch/>
-        </p:blipFill>
-        <p:spPr>
-          <a:xfrm>
-            <a:off x="1829160" y="2700000"/>
-            <a:ext cx="942840" cy="1800000"/>
-          </a:xfrm>
-          <a:prstGeom prst="rect">
-            <a:avLst/>
-          </a:prstGeom>
-          <a:noFill/>
-          <a:ln w="38160">
-            <a:noFill/>
-          </a:ln>
-        </p:spPr>
-      </p:pic>
-      <p:sp>
-        <p:nvSpPr>
-          <p:cNvPr id="77" name="Right Arrow 15"/>
+          <p:cNvPr id="85" name="Right Arrow 17"/>
           <p:cNvSpPr/>
           <p:nvPr/>
         </p:nvSpPr>
         <p:spPr>
           <a:xfrm>
-            <a:off x="1554480" y="3477960"/>
+            <a:off x="7751160" y="885960"/>
             <a:ext cx="204840" cy="158040"/>
           </a:xfrm>
           <a:prstGeom prst="rightArrow">
@@ -5092,7 +4890,7 @@
               </a:gs>
             </a:gsLst>
             <a:path path="circle">
-              <a:fillToRect l="0" t="0" r="100000" b="100000"/>
+              <a:fillToRect r="100000" b="100000"/>
             </a:path>
           </a:gradFill>
           <a:ln>
@@ -5117,8 +4915,8 @@
           <a:bodyPr lIns="90000" tIns="34200" rIns="90000" bIns="34200" anchor="ctr">
             <a:noAutofit/>
           </a:bodyPr>
-          <a:p>
-            <a:pPr/>
+          <a:lstStyle/>
+          <a:p>
             <a:endParaRPr lang="en-GB" sz="1400" b="0" u="none" strike="noStrike">
               <a:solidFill>
                 <a:schemeClr val="lt1"/>
@@ -5132,517 +4930,7 @@
       </p:sp>
       <p:sp>
         <p:nvSpPr>
-          <p:cNvPr id="78" name="Right Arrow 16"/>
-          <p:cNvSpPr/>
-          <p:nvPr/>
-        </p:nvSpPr>
-        <p:spPr>
-          <a:xfrm>
-            <a:off x="1055160" y="828000"/>
-            <a:ext cx="204840" cy="158040"/>
-          </a:xfrm>
-          <a:prstGeom prst="rightArrow">
-            <a:avLst>
-              <a:gd name="adj1" fmla="val 50000"/>
-              <a:gd name="adj2" fmla="val 50000"/>
-            </a:avLst>
-          </a:prstGeom>
-          <a:gradFill rotWithShape="0">
-            <a:gsLst>
-              <a:gs pos="10000">
-                <a:srgbClr val="15E9B5"/>
-              </a:gs>
-              <a:gs pos="75000">
-                <a:srgbClr val="00167E"/>
-              </a:gs>
-            </a:gsLst>
-            <a:path path="circle">
-              <a:fillToRect l="0" t="0" r="100000" b="100000"/>
-            </a:path>
-          </a:gradFill>
-          <a:ln>
-            <a:noFill/>
-          </a:ln>
-        </p:spPr>
-        <p:style>
-          <a:lnRef idx="2">
-            <a:schemeClr val="accent1">
-              <a:shade val="15000"/>
-            </a:schemeClr>
-          </a:lnRef>
-          <a:fillRef idx="1">
-            <a:schemeClr val="accent1"/>
-          </a:fillRef>
-          <a:effectRef idx="0">
-            <a:schemeClr val="accent1"/>
-          </a:effectRef>
-          <a:fontRef idx="minor"/>
-        </p:style>
-        <p:txBody>
-          <a:bodyPr lIns="90000" tIns="34200" rIns="90000" bIns="34200" anchor="ctr">
-            <a:noAutofit/>
-          </a:bodyPr>
-          <a:p>
-            <a:pPr/>
-            <a:endParaRPr lang="en-GB" sz="1400" b="0" u="none" strike="noStrike">
-              <a:solidFill>
-                <a:schemeClr val="lt1"/>
-              </a:solidFill>
-              <a:effectLst/>
-              <a:uFillTx/>
-              <a:latin typeface="Arial"/>
-            </a:endParaRPr>
-          </a:p>
-        </p:txBody>
-      </p:sp>
-      <p:sp>
-        <p:nvSpPr>
-          <p:cNvPr id="79" name="Content Placeholder 2"/>
-          <p:cNvSpPr txBox="1"/>
-          <p:nvPr/>
-        </p:nvSpPr>
-        <p:spPr>
-          <a:xfrm>
-            <a:off x="3240000" y="2530800"/>
-            <a:ext cx="5760000" cy="1429200"/>
-          </a:xfrm>
-          <a:prstGeom prst="rect">
-            <a:avLst/>
-          </a:prstGeom>
-          <a:noFill/>
-          <a:ln w="0">
-            <a:noFill/>
-          </a:ln>
-        </p:spPr>
-        <p:txBody>
-          <a:bodyPr anchor="t">
-            <a:normAutofit/>
-          </a:bodyPr>
-          <a:p>
-            <a:pPr algn="ctr">
-              <a:lnSpc>
-                <a:spcPct val="100000"/>
-              </a:lnSpc>
-              <a:tabLst>
-                <a:tab pos="0" algn="l"/>
-              </a:tabLst>
-            </a:pPr>
-            <a:r>
-              <a:rPr lang="en-GB" sz="6600" b="1" u="none" strike="noStrike">
-                <a:solidFill>
-                  <a:srgbClr val="000000"/>
-                </a:solidFill>
-                <a:effectLst/>
-                <a:uFillTx/>
-                <a:latin typeface="Segoe UI"/>
-                <a:ea typeface="Segoe UI"/>
-              </a:rPr>
-              <a:t>7 CLICKS VS 1</a:t>
-            </a:r>
-            <a:endParaRPr lang="en-GB" sz="6600" b="1" u="none" strike="noStrike">
-              <a:solidFill>
-                <a:srgbClr val="000000"/>
-              </a:solidFill>
-              <a:effectLst/>
-              <a:uFillTx/>
-              <a:latin typeface="Segoe UI"/>
-            </a:endParaRPr>
-          </a:p>
-        </p:txBody>
-      </p:sp>
-      <p:sp>
-        <p:nvSpPr>
-          <p:cNvPr id="80" name="Right Arrow 10"/>
-          <p:cNvSpPr/>
-          <p:nvPr/>
-        </p:nvSpPr>
-        <p:spPr>
-          <a:xfrm>
-            <a:off x="2135160" y="849960"/>
-            <a:ext cx="204840" cy="158040"/>
-          </a:xfrm>
-          <a:prstGeom prst="rightArrow">
-            <a:avLst>
-              <a:gd name="adj1" fmla="val 50000"/>
-              <a:gd name="adj2" fmla="val 50000"/>
-            </a:avLst>
-          </a:prstGeom>
-          <a:gradFill rotWithShape="0">
-            <a:gsLst>
-              <a:gs pos="10000">
-                <a:srgbClr val="15E9B5"/>
-              </a:gs>
-              <a:gs pos="75000">
-                <a:srgbClr val="00167E"/>
-              </a:gs>
-            </a:gsLst>
-            <a:path path="circle">
-              <a:fillToRect l="0" t="0" r="100000" b="100000"/>
-            </a:path>
-          </a:gradFill>
-          <a:ln>
-            <a:noFill/>
-          </a:ln>
-        </p:spPr>
-        <p:style>
-          <a:lnRef idx="2">
-            <a:schemeClr val="accent1">
-              <a:shade val="15000"/>
-            </a:schemeClr>
-          </a:lnRef>
-          <a:fillRef idx="1">
-            <a:schemeClr val="accent1"/>
-          </a:fillRef>
-          <a:effectRef idx="0">
-            <a:schemeClr val="accent1"/>
-          </a:effectRef>
-          <a:fontRef idx="minor"/>
-        </p:style>
-        <p:txBody>
-          <a:bodyPr lIns="90000" tIns="34200" rIns="90000" bIns="34200" anchor="ctr">
-            <a:noAutofit/>
-          </a:bodyPr>
-          <a:p>
-            <a:pPr/>
-            <a:endParaRPr lang="en-GB" sz="1400" b="0" u="none" strike="noStrike">
-              <a:solidFill>
-                <a:schemeClr val="lt1"/>
-              </a:solidFill>
-              <a:effectLst/>
-              <a:uFillTx/>
-              <a:latin typeface="Arial"/>
-            </a:endParaRPr>
-          </a:p>
-        </p:txBody>
-      </p:sp>
-      <p:sp>
-        <p:nvSpPr>
-          <p:cNvPr id="81" name="Right Arrow 11"/>
-          <p:cNvSpPr/>
-          <p:nvPr/>
-        </p:nvSpPr>
-        <p:spPr>
-          <a:xfrm>
-            <a:off x="3240000" y="849960"/>
-            <a:ext cx="204840" cy="158040"/>
-          </a:xfrm>
-          <a:prstGeom prst="rightArrow">
-            <a:avLst>
-              <a:gd name="adj1" fmla="val 50000"/>
-              <a:gd name="adj2" fmla="val 50000"/>
-            </a:avLst>
-          </a:prstGeom>
-          <a:gradFill rotWithShape="0">
-            <a:gsLst>
-              <a:gs pos="10000">
-                <a:srgbClr val="15E9B5"/>
-              </a:gs>
-              <a:gs pos="75000">
-                <a:srgbClr val="00167E"/>
-              </a:gs>
-            </a:gsLst>
-            <a:path path="circle">
-              <a:fillToRect l="0" t="0" r="100000" b="100000"/>
-            </a:path>
-          </a:gradFill>
-          <a:ln>
-            <a:noFill/>
-          </a:ln>
-        </p:spPr>
-        <p:style>
-          <a:lnRef idx="2">
-            <a:schemeClr val="accent1">
-              <a:shade val="15000"/>
-            </a:schemeClr>
-          </a:lnRef>
-          <a:fillRef idx="1">
-            <a:schemeClr val="accent1"/>
-          </a:fillRef>
-          <a:effectRef idx="0">
-            <a:schemeClr val="accent1"/>
-          </a:effectRef>
-          <a:fontRef idx="minor"/>
-        </p:style>
-        <p:txBody>
-          <a:bodyPr lIns="90000" tIns="34200" rIns="90000" bIns="34200" anchor="ctr">
-            <a:noAutofit/>
-          </a:bodyPr>
-          <a:p>
-            <a:pPr/>
-            <a:endParaRPr lang="en-GB" sz="1400" b="0" u="none" strike="noStrike">
-              <a:solidFill>
-                <a:schemeClr val="lt1"/>
-              </a:solidFill>
-              <a:effectLst/>
-              <a:uFillTx/>
-              <a:latin typeface="Arial"/>
-            </a:endParaRPr>
-          </a:p>
-        </p:txBody>
-      </p:sp>
-      <p:sp>
-        <p:nvSpPr>
-          <p:cNvPr id="82" name="Right Arrow 12"/>
-          <p:cNvSpPr/>
-          <p:nvPr/>
-        </p:nvSpPr>
-        <p:spPr>
-          <a:xfrm>
-            <a:off x="4356000" y="864000"/>
-            <a:ext cx="204840" cy="158040"/>
-          </a:xfrm>
-          <a:prstGeom prst="rightArrow">
-            <a:avLst>
-              <a:gd name="adj1" fmla="val 50000"/>
-              <a:gd name="adj2" fmla="val 50000"/>
-            </a:avLst>
-          </a:prstGeom>
-          <a:gradFill rotWithShape="0">
-            <a:gsLst>
-              <a:gs pos="10000">
-                <a:srgbClr val="15E9B5"/>
-              </a:gs>
-              <a:gs pos="75000">
-                <a:srgbClr val="00167E"/>
-              </a:gs>
-            </a:gsLst>
-            <a:path path="circle">
-              <a:fillToRect l="0" t="0" r="100000" b="100000"/>
-            </a:path>
-          </a:gradFill>
-          <a:ln>
-            <a:noFill/>
-          </a:ln>
-        </p:spPr>
-        <p:style>
-          <a:lnRef idx="2">
-            <a:schemeClr val="accent1">
-              <a:shade val="15000"/>
-            </a:schemeClr>
-          </a:lnRef>
-          <a:fillRef idx="1">
-            <a:schemeClr val="accent1"/>
-          </a:fillRef>
-          <a:effectRef idx="0">
-            <a:schemeClr val="accent1"/>
-          </a:effectRef>
-          <a:fontRef idx="minor"/>
-        </p:style>
-        <p:txBody>
-          <a:bodyPr lIns="90000" tIns="34200" rIns="90000" bIns="34200" anchor="ctr">
-            <a:noAutofit/>
-          </a:bodyPr>
-          <a:p>
-            <a:pPr/>
-            <a:endParaRPr lang="en-GB" sz="1400" b="0" u="none" strike="noStrike">
-              <a:solidFill>
-                <a:schemeClr val="lt1"/>
-              </a:solidFill>
-              <a:effectLst/>
-              <a:uFillTx/>
-              <a:latin typeface="Arial"/>
-            </a:endParaRPr>
-          </a:p>
-        </p:txBody>
-      </p:sp>
-      <p:sp>
-        <p:nvSpPr>
-          <p:cNvPr id="83" name="Right Arrow 13"/>
-          <p:cNvSpPr/>
-          <p:nvPr/>
-        </p:nvSpPr>
-        <p:spPr>
-          <a:xfrm>
-            <a:off x="5478840" y="864000"/>
-            <a:ext cx="204840" cy="158040"/>
-          </a:xfrm>
-          <a:prstGeom prst="rightArrow">
-            <a:avLst>
-              <a:gd name="adj1" fmla="val 50000"/>
-              <a:gd name="adj2" fmla="val 50000"/>
-            </a:avLst>
-          </a:prstGeom>
-          <a:gradFill rotWithShape="0">
-            <a:gsLst>
-              <a:gs pos="10000">
-                <a:srgbClr val="15E9B5"/>
-              </a:gs>
-              <a:gs pos="75000">
-                <a:srgbClr val="00167E"/>
-              </a:gs>
-            </a:gsLst>
-            <a:path path="circle">
-              <a:fillToRect l="0" t="0" r="100000" b="100000"/>
-            </a:path>
-          </a:gradFill>
-          <a:ln>
-            <a:noFill/>
-          </a:ln>
-        </p:spPr>
-        <p:style>
-          <a:lnRef idx="2">
-            <a:schemeClr val="accent1">
-              <a:shade val="15000"/>
-            </a:schemeClr>
-          </a:lnRef>
-          <a:fillRef idx="1">
-            <a:schemeClr val="accent1"/>
-          </a:fillRef>
-          <a:effectRef idx="0">
-            <a:schemeClr val="accent1"/>
-          </a:effectRef>
-          <a:fontRef idx="minor"/>
-        </p:style>
-        <p:txBody>
-          <a:bodyPr lIns="90000" tIns="34200" rIns="90000" bIns="34200" anchor="ctr">
-            <a:noAutofit/>
-          </a:bodyPr>
-          <a:p>
-            <a:pPr/>
-            <a:endParaRPr lang="en-GB" sz="1400" b="0" u="none" strike="noStrike">
-              <a:solidFill>
-                <a:schemeClr val="lt1"/>
-              </a:solidFill>
-              <a:effectLst/>
-              <a:uFillTx/>
-              <a:latin typeface="Arial"/>
-            </a:endParaRPr>
-          </a:p>
-        </p:txBody>
-      </p:sp>
-      <p:sp>
-        <p:nvSpPr>
-          <p:cNvPr id="84" name="Right Arrow 14"/>
-          <p:cNvSpPr/>
-          <p:nvPr/>
-        </p:nvSpPr>
-        <p:spPr>
-          <a:xfrm>
-            <a:off x="6622560" y="870120"/>
-            <a:ext cx="204840" cy="158040"/>
-          </a:xfrm>
-          <a:prstGeom prst="rightArrow">
-            <a:avLst>
-              <a:gd name="adj1" fmla="val 50000"/>
-              <a:gd name="adj2" fmla="val 50000"/>
-            </a:avLst>
-          </a:prstGeom>
-          <a:gradFill rotWithShape="0">
-            <a:gsLst>
-              <a:gs pos="10000">
-                <a:srgbClr val="15E9B5"/>
-              </a:gs>
-              <a:gs pos="75000">
-                <a:srgbClr val="00167E"/>
-              </a:gs>
-            </a:gsLst>
-            <a:path path="circle">
-              <a:fillToRect l="0" t="0" r="100000" b="100000"/>
-            </a:path>
-          </a:gradFill>
-          <a:ln>
-            <a:noFill/>
-          </a:ln>
-        </p:spPr>
-        <p:style>
-          <a:lnRef idx="2">
-            <a:schemeClr val="accent1">
-              <a:shade val="15000"/>
-            </a:schemeClr>
-          </a:lnRef>
-          <a:fillRef idx="1">
-            <a:schemeClr val="accent1"/>
-          </a:fillRef>
-          <a:effectRef idx="0">
-            <a:schemeClr val="accent1"/>
-          </a:effectRef>
-          <a:fontRef idx="minor"/>
-        </p:style>
-        <p:txBody>
-          <a:bodyPr lIns="90000" tIns="34200" rIns="90000" bIns="34200" anchor="ctr">
-            <a:noAutofit/>
-          </a:bodyPr>
-          <a:p>
-            <a:pPr/>
-            <a:endParaRPr lang="en-GB" sz="1400" b="0" u="none" strike="noStrike">
-              <a:solidFill>
-                <a:schemeClr val="lt1"/>
-              </a:solidFill>
-              <a:effectLst/>
-              <a:uFillTx/>
-              <a:latin typeface="Arial"/>
-            </a:endParaRPr>
-          </a:p>
-        </p:txBody>
-      </p:sp>
-      <p:sp>
-        <p:nvSpPr>
-          <p:cNvPr id="85" name="Right Arrow 17"/>
-          <p:cNvSpPr/>
-          <p:nvPr/>
-        </p:nvSpPr>
-        <p:spPr>
-          <a:xfrm>
-            <a:off x="7751160" y="885960"/>
-            <a:ext cx="204840" cy="158040"/>
-          </a:xfrm>
-          <a:prstGeom prst="rightArrow">
-            <a:avLst>
-              <a:gd name="adj1" fmla="val 50000"/>
-              <a:gd name="adj2" fmla="val 50000"/>
-            </a:avLst>
-          </a:prstGeom>
-          <a:gradFill rotWithShape="0">
-            <a:gsLst>
-              <a:gs pos="10000">
-                <a:srgbClr val="15E9B5"/>
-              </a:gs>
-              <a:gs pos="75000">
-                <a:srgbClr val="00167E"/>
-              </a:gs>
-            </a:gsLst>
-            <a:path path="circle">
-              <a:fillToRect l="0" t="0" r="100000" b="100000"/>
-            </a:path>
-          </a:gradFill>
-          <a:ln>
-            <a:noFill/>
-          </a:ln>
-        </p:spPr>
-        <p:style>
-          <a:lnRef idx="2">
-            <a:schemeClr val="accent1">
-              <a:shade val="15000"/>
-            </a:schemeClr>
-          </a:lnRef>
-          <a:fillRef idx="1">
-            <a:schemeClr val="accent1"/>
-          </a:fillRef>
-          <a:effectRef idx="0">
-            <a:schemeClr val="accent1"/>
-          </a:effectRef>
-          <a:fontRef idx="minor"/>
-        </p:style>
-        <p:txBody>
-          <a:bodyPr lIns="90000" tIns="34200" rIns="90000" bIns="34200" anchor="ctr">
-            <a:noAutofit/>
-          </a:bodyPr>
-          <a:p>
-            <a:pPr/>
-            <a:endParaRPr lang="en-GB" sz="1400" b="0" u="none" strike="noStrike">
-              <a:solidFill>
-                <a:schemeClr val="lt1"/>
-              </a:solidFill>
-              <a:effectLst/>
-              <a:uFillTx/>
-              <a:latin typeface="Arial"/>
-            </a:endParaRPr>
-          </a:p>
-        </p:txBody>
-      </p:sp>
-      <p:sp>
-        <p:nvSpPr>
-          <p:cNvPr id="86" name=""/>
+          <p:cNvPr id="86" name="Connecteur droit 85"/>
           <p:cNvSpPr/>
           <p:nvPr/>
         </p:nvSpPr>
@@ -5662,17 +4950,23 @@
           </a:ln>
         </p:spPr>
         <p:style>
-          <a:lnRef idx="0"/>
-          <a:fillRef idx="0"/>
-          <a:effectRef idx="0"/>
+          <a:lnRef idx="0">
+            <a:scrgbClr r="0" g="0" b="0"/>
+          </a:lnRef>
+          <a:fillRef idx="0">
+            <a:scrgbClr r="0" g="0" b="0"/>
+          </a:fillRef>
+          <a:effectRef idx="0">
+            <a:scrgbClr r="0" g="0" b="0"/>
+          </a:effectRef>
           <a:fontRef idx="minor"/>
         </p:style>
         <p:txBody>
           <a:bodyPr lIns="90000" tIns="-45000" rIns="90000" bIns="-45000" anchor="ctr">
             <a:noAutofit/>
           </a:bodyPr>
-          <a:p>
-            <a:pPr/>
+          <a:lstStyle/>
+          <a:p>
             <a:endParaRPr lang="en-GB" sz="1800" b="0" u="none" strike="noStrike">
               <a:solidFill>
                 <a:srgbClr val="000000"/>
@@ -5686,19 +4980,14 @@
       </p:sp>
     </p:spTree>
   </p:cSld>
-  <mc:AlternateContent>
-    <mc:Choice Requires="p14">
-      <p:transition spd="slow" p14:dur="2000"/>
-    </mc:Choice>
-    <mc:Fallback>
-      <p:transition spd="slow"/>
-    </mc:Fallback>
-  </mc:AlternateContent>
+  <p:clrMapOvr>
+    <a:masterClrMapping/>
+  </p:clrMapOvr>
 </p:sld>
 </file>
 
-<file path=ppt/slides/slide5.xml><?xml version="1.0" encoding="utf-8"?>
-<p:sld xmlns:a="http://schemas.openxmlformats.org/drawingml/2006/main" xmlns:p="http://schemas.openxmlformats.org/presentationml/2006/main" xmlns:r="http://schemas.openxmlformats.org/officeDocument/2006/relationships" xmlns:p14="http://schemas.microsoft.com/office/powerpoint/2010/main" xmlns:p15="http://schemas.microsoft.com/office/powerpoint/2012/main" xmlns:mc="http://schemas.openxmlformats.org/markup-compatibility/2006">
+<file path=ppt/slides/slide4.xml><?xml version="1.0" encoding="utf-8"?>
+<p:sld xmlns:a="http://schemas.openxmlformats.org/drawingml/2006/main" xmlns:r="http://schemas.openxmlformats.org/officeDocument/2006/relationships" xmlns:p="http://schemas.openxmlformats.org/presentationml/2006/main">
   <p:cSld>
     <p:spTree>
       <p:nvGrpSpPr>
@@ -5737,6 +5026,7 @@
           <a:bodyPr anchor="ctr">
             <a:noAutofit/>
           </a:bodyPr>
+          <a:lstStyle/>
           <a:p>
             <a:pPr>
               <a:lnSpc>
@@ -5789,34 +5079,21 @@
           <a:bodyPr anchor="ctr">
             <a:noAutofit/>
           </a:bodyPr>
-          <a:p>
-            <a:pPr marL="216000" indent="-216000">
+          <a:lstStyle/>
+          <a:p>
+            <a:pPr>
               <a:lnSpc>
                 <a:spcPct val="100000"/>
               </a:lnSpc>
               <a:buClr>
                 <a:srgbClr val="000000"/>
               </a:buClr>
-              <a:buFont typeface="Arial"/>
-              <a:buChar char="●"/>
             </a:pPr>
-            <a:r>
-              <a:rPr lang="en-GB" sz="2800" b="0" u="none" strike="noStrike">
-                <a:solidFill>
-                  <a:srgbClr val="000000"/>
-                </a:solidFill>
-                <a:effectLst/>
-                <a:uFillTx/>
-                <a:latin typeface="Segoe UI"/>
-                <a:ea typeface="Segoe UI"/>
-              </a:rPr>
-              <a:t> </a:t>
-            </a:r>
             <a:br>
-              <a:rPr sz="2800"/>
+              <a:rPr sz="2800" dirty="0"/>
             </a:br>
             <a:r>
-              <a:rPr lang="en-GB" sz="2800" b="0" u="none" strike="noStrike">
+              <a:rPr lang="en-GB" sz="2800" b="0" u="none" strike="noStrike" dirty="0">
                 <a:solidFill>
                   <a:srgbClr val="000000"/>
                 </a:solidFill>
@@ -5828,10 +5105,10 @@
               <a:t> -  Better user retention</a:t>
             </a:r>
             <a:br>
-              <a:rPr sz="2800"/>
+              <a:rPr sz="2800" dirty="0"/>
             </a:br>
             <a:r>
-              <a:rPr lang="en-GB" sz="2800" b="0" u="none" strike="noStrike">
+              <a:rPr lang="en-GB" sz="2800" b="0" u="none" strike="noStrike" dirty="0">
                 <a:solidFill>
                   <a:srgbClr val="000000"/>
                 </a:solidFill>
@@ -5843,10 +5120,10 @@
               <a:t> -  Faster navigation</a:t>
             </a:r>
             <a:br>
-              <a:rPr sz="2800"/>
+              <a:rPr sz="2800" dirty="0"/>
             </a:br>
             <a:r>
-              <a:rPr lang="en-GB" sz="2800" b="0" u="none" strike="noStrike">
+              <a:rPr lang="en-GB" sz="2800" b="0" u="none" strike="noStrike" dirty="0">
                 <a:solidFill>
                   <a:srgbClr val="000000"/>
                 </a:solidFill>
@@ -5857,7 +5134,7 @@
               </a:rPr>
               <a:t> -  Application feedback</a:t>
             </a:r>
-            <a:endParaRPr lang="en-GB" sz="2800" b="0" u="none" strike="noStrike">
+            <a:endParaRPr lang="en-GB" sz="2800" b="0" u="none" strike="noStrike" dirty="0">
               <a:solidFill>
                 <a:srgbClr val="000000"/>
               </a:solidFill>
@@ -5870,19 +5147,14 @@
       </p:sp>
     </p:spTree>
   </p:cSld>
-  <mc:AlternateContent>
-    <mc:Choice Requires="p14">
-      <p:transition spd="slow" p14:dur="2000"/>
-    </mc:Choice>
-    <mc:Fallback>
-      <p:transition spd="slow"/>
-    </mc:Fallback>
-  </mc:AlternateContent>
+  <p:clrMapOvr>
+    <a:masterClrMapping/>
+  </p:clrMapOvr>
 </p:sld>
 </file>
 
-<file path=ppt/slides/slide6.xml><?xml version="1.0" encoding="utf-8"?>
-<p:sld xmlns:a="http://schemas.openxmlformats.org/drawingml/2006/main" xmlns:p="http://schemas.openxmlformats.org/presentationml/2006/main" xmlns:r="http://schemas.openxmlformats.org/officeDocument/2006/relationships" xmlns:p14="http://schemas.microsoft.com/office/powerpoint/2010/main" xmlns:p15="http://schemas.microsoft.com/office/powerpoint/2012/main" xmlns:mc="http://schemas.openxmlformats.org/markup-compatibility/2006">
+<file path=ppt/slides/slide5.xml><?xml version="1.0" encoding="utf-8"?>
+<p:sld xmlns:a="http://schemas.openxmlformats.org/drawingml/2006/main" xmlns:r="http://schemas.openxmlformats.org/officeDocument/2006/relationships" xmlns:p="http://schemas.openxmlformats.org/presentationml/2006/main">
   <p:cSld>
     <p:spTree>
       <p:nvGrpSpPr>
@@ -5910,7 +5182,7 @@
         </p:nvSpPr>
         <p:spPr>
           <a:xfrm>
-            <a:off x="1260000" y="1980000"/>
+            <a:off x="-274602" y="2059513"/>
             <a:ext cx="9143640" cy="760320"/>
           </a:xfrm>
           <a:prstGeom prst="rect">
@@ -5925,6 +5197,7 @@
           <a:bodyPr lIns="91440" tIns="45720" rIns="91440" bIns="45720" anchor="ctr">
             <a:noAutofit/>
           </a:bodyPr>
+          <a:lstStyle/>
           <a:p>
             <a:pPr indent="0" algn="l">
               <a:lnSpc>
@@ -5933,7 +5206,7 @@
               <a:buNone/>
             </a:pPr>
             <a:r>
-              <a:rPr lang="en-GB" sz="2800" b="1" u="none" strike="noStrike">
+              <a:rPr lang="en-GB" sz="2800" b="1" u="none" strike="noStrike" dirty="0">
                 <a:solidFill>
                   <a:srgbClr val="000000"/>
                 </a:solidFill>
@@ -5944,7 +5217,7 @@
               </a:rPr>
               <a:t>Questions ?</a:t>
             </a:r>
-            <a:endParaRPr lang="en-GB" sz="2800" b="0" u="none" strike="noStrike">
+            <a:endParaRPr lang="en-GB" sz="2800" b="0" u="none" strike="noStrike" dirty="0">
               <a:solidFill>
                 <a:srgbClr val="000000"/>
               </a:solidFill>
@@ -6020,7 +5293,7 @@
                 <a:latin typeface="Segoe UI"/>
                 <a:ea typeface="Arial"/>
               </a:rPr>
-              <a:t>&lt;number&gt;</a:t>
+              <a:t>5</a:t>
             </a:fld>
             <a:endParaRPr lang="en-GB" sz="1000" b="0" u="none" strike="noStrike">
               <a:solidFill>
@@ -6035,12 +5308,12 @@
       </p:sp>
       <p:pic>
         <p:nvPicPr>
-          <p:cNvPr id="91" name=""/>
+          <p:cNvPr id="91" name="Image 90"/>
           <p:cNvPicPr/>
           <p:nvPr/>
         </p:nvPicPr>
         <p:blipFill>
-          <a:blip r:embed="rId1"/>
+          <a:blip r:embed="rId2"/>
           <a:stretch/>
         </p:blipFill>
         <p:spPr>
@@ -6059,19 +5332,14 @@
       </p:pic>
     </p:spTree>
   </p:cSld>
-  <mc:AlternateContent>
-    <mc:Choice Requires="p14">
-      <p:transition spd="slow" p14:dur="2000"/>
-    </mc:Choice>
-    <mc:Fallback>
-      <p:transition spd="slow"/>
-    </mc:Fallback>
-  </mc:AlternateContent>
+  <p:clrMapOvr>
+    <a:masterClrMapping/>
+  </p:clrMapOvr>
 </p:sld>
 </file>
 
 <file path=ppt/theme/theme1.xml><?xml version="1.0" encoding="utf-8"?>
-<a:theme xmlns:a="http://schemas.openxmlformats.org/drawingml/2006/main" xmlns:r="http://schemas.openxmlformats.org/officeDocument/2006/relationships" name="default">
+<a:theme xmlns:a="http://schemas.openxmlformats.org/drawingml/2006/main" name="default">
   <a:themeElements>
     <a:clrScheme name="Simple Light">
       <a:dk1>
@@ -6113,7 +5381,7 @@
     </a:clrScheme>
     <a:fontScheme name="Office">
       <a:majorFont>
-        <a:latin typeface="Arial" pitchFamily="0" charset="1"/>
+        <a:latin typeface="Arial"/>
         <a:ea typeface=""/>
         <a:cs typeface=""/>
         <a:font script="Jpan" typeface="ＭＳ Ｐゴシック"/>
@@ -6148,7 +5416,7 @@
         <a:font script="Geor" typeface="Sylfaen"/>
       </a:majorFont>
       <a:minorFont>
-        <a:latin typeface="Arial" pitchFamily="0" charset="1"/>
+        <a:latin typeface="Arial"/>
         <a:ea typeface=""/>
         <a:cs typeface=""/>
         <a:font script="Jpan" typeface="ＭＳ Ｐゴシック"/>
@@ -6207,7 +5475,7 @@
             </a:gs>
           </a:gsLst>
           <a:lin ang="16200000" scaled="1"/>
-          <a:tileRect l="0" t="0" r="0" b="0"/>
+          <a:tileRect/>
         </a:gradFill>
         <a:gradFill>
           <a:gsLst>
@@ -6225,7 +5493,7 @@
             </a:gs>
           </a:gsLst>
           <a:lin ang="16200000" scaled="0"/>
-          <a:tileRect l="0" t="0" r="0" b="0"/>
+          <a:tileRect/>
         </a:gradFill>
       </a:fillStyleLst>
       <a:lnStyleLst>
@@ -6276,7 +5544,7 @@
           <a:path path="circle">
             <a:fillToRect l="50000" t="-80000" r="50000" b="180000"/>
           </a:path>
-          <a:tileRect l="0" t="0" r="0" b="0"/>
+          <a:tileRect/>
         </a:gradFill>
         <a:gradFill>
           <a:gsLst>
@@ -6294,10 +5562,12 @@
           <a:path path="circle">
             <a:fillToRect l="50000" t="50000" r="50000" b="50000"/>
           </a:path>
-          <a:tileRect l="0" t="0" r="0" b="0"/>
+          <a:tileRect/>
         </a:gradFill>
       </a:bgFillStyleLst>
     </a:fmtScheme>
   </a:themeElements>
+  <a:objectDefaults/>
+  <a:extraClrSchemeLst/>
 </a:theme>
 </file>
--- a/pitch.pptx
+++ b/pitch.pptx
@@ -264,7 +264,7 @@
                 <a:latin typeface="Segoe UI"/>
                 <a:ea typeface="Arial"/>
               </a:rPr>
-              <a:t>‹N°›</a:t>
+              <a:t>‹#›</a:t>
             </a:fld>
             <a:endParaRPr lang="en-GB" sz="1000" b="0" u="none" strike="noStrike">
               <a:solidFill>
@@ -805,7 +805,7 @@
                 <a:latin typeface="Segoe UI"/>
                 <a:ea typeface="Arial"/>
               </a:rPr>
-              <a:t>‹N°›</a:t>
+              <a:t>‹#›</a:t>
             </a:fld>
             <a:endParaRPr lang="en-GB" sz="1000" b="0" u="none" strike="noStrike">
               <a:solidFill>
@@ -1768,7 +1768,7 @@
                 <a:latin typeface="Segoe UI"/>
                 <a:ea typeface="Arial"/>
               </a:rPr>
-              <a:t>‹N°›</a:t>
+              <a:t>‹#›</a:t>
             </a:fld>
             <a:endParaRPr lang="en-GB" sz="1000" b="0" u="none" strike="noStrike">
               <a:solidFill>
@@ -2013,7 +2013,7 @@
                 <a:latin typeface="Segoe UI"/>
                 <a:ea typeface="Arial"/>
               </a:rPr>
-              <a:t>‹N°›</a:t>
+              <a:t>‹#›</a:t>
             </a:fld>
             <a:endParaRPr lang="en-GB" sz="1000" b="0" u="none" strike="noStrike">
               <a:solidFill>
@@ -2316,7 +2316,7 @@
                 <a:latin typeface="Segoe UI"/>
                 <a:ea typeface="Arial"/>
               </a:rPr>
-              <a:t>‹N°›</a:t>
+              <a:t>‹#›</a:t>
             </a:fld>
             <a:endParaRPr lang="en-GB" sz="1000" b="0" u="none" strike="noStrike">
               <a:solidFill>
@@ -2619,7 +2619,7 @@
                 <a:latin typeface="Segoe UI"/>
                 <a:ea typeface="Arial"/>
               </a:rPr>
-              <a:t>‹N°›</a:t>
+              <a:t>‹#›</a:t>
             </a:fld>
             <a:endParaRPr lang="en-GB" sz="1000" b="0" u="none" strike="noStrike">
               <a:solidFill>
@@ -2898,7 +2898,7 @@
                 <a:latin typeface="Segoe UI"/>
                 <a:ea typeface="Arial"/>
               </a:rPr>
-              <a:t>‹N°›</a:t>
+              <a:t>‹#›</a:t>
             </a:fld>
             <a:endParaRPr lang="en-GB" sz="1000" b="0" u="none" strike="noStrike">
               <a:solidFill>
@@ -3119,7 +3119,7 @@
                 <a:latin typeface="Segoe UI"/>
                 <a:ea typeface="Arial"/>
               </a:rPr>
-              <a:t>‹N°›</a:t>
+              <a:t>‹#›</a:t>
             </a:fld>
             <a:endParaRPr lang="en-GB" sz="1000" b="0" u="none" strike="noStrike">
               <a:solidFill>
@@ -3340,7 +3340,7 @@
                 <a:latin typeface="Segoe UI"/>
                 <a:ea typeface="Arial"/>
               </a:rPr>
-              <a:t>‹N°›</a:t>
+              <a:t>‹#›</a:t>
             </a:fld>
             <a:endParaRPr lang="en-GB" sz="1000" b="0" u="none" strike="noStrike">
               <a:solidFill>
@@ -3774,7 +3774,7 @@
         </p:spPr>
         <p:txBody>
           <a:bodyPr lIns="91440" tIns="45720" rIns="91440" bIns="45720" anchor="t">
-            <a:normAutofit lnSpcReduction="9999"/>
+            <a:normAutofit lnSpcReduction="10000"/>
           </a:bodyPr>
           <a:lstStyle/>
           <a:p>
@@ -3834,29 +3834,6 @@
           </a:ln>
         </p:spPr>
       </p:pic>
-      <p:sp>
-        <p:nvSpPr>
-          <p:cNvPr id="3" name="PlaceHolder 2"/>
-          <p:cNvSpPr>
-            <a:spLocks noGrp="1"/>
-          </p:cNvSpPr>
-          <p:nvPr>
-            <p:ph type="sldNum" idx="2"/>
-          </p:nvPr>
-        </p:nvSpPr>
-        <p:spPr/>
-        <p:txBody>
-          <a:bodyPr/>
-          <a:lstStyle/>
-          <a:p>
-            <a:fld id="{545679E5-54B7-483B-8378-6A10DE525E2E}" type="slidenum">
-              <a:rPr/>
-              <a:t>1</a:t>
-            </a:fld>
-            <a:endParaRPr/>
-          </a:p>
-        </p:txBody>
-      </p:sp>
     </p:spTree>
   </p:cSld>
   <p:clrMapOvr>
@@ -4061,29 +4038,6 @@
               <a:uFillTx/>
               <a:latin typeface="Arial"/>
             </a:endParaRPr>
-          </a:p>
-        </p:txBody>
-      </p:sp>
-      <p:sp>
-        <p:nvSpPr>
-          <p:cNvPr id="2" name="PlaceHolder 1"/>
-          <p:cNvSpPr>
-            <a:spLocks noGrp="1"/>
-          </p:cNvSpPr>
-          <p:nvPr>
-            <p:ph type="sldNum" idx="1"/>
-          </p:nvPr>
-        </p:nvSpPr>
-        <p:spPr/>
-        <p:txBody>
-          <a:bodyPr/>
-          <a:lstStyle/>
-          <a:p>
-            <a:fld id="{6D960C9D-F41A-4336-A424-36DF766A677D}" type="slidenum">
-              <a:rPr/>
-              <a:t>2</a:t>
-            </a:fld>
-            <a:endParaRPr/>
           </a:p>
         </p:txBody>
       </p:sp>
@@ -5034,7 +4988,7 @@
               </a:lnSpc>
             </a:pPr>
             <a:r>
-              <a:rPr lang="en-GB" sz="2800" b="1" u="none" strike="noStrike">
+              <a:rPr lang="en-GB" sz="2800" b="1" u="none" strike="noStrike" dirty="0">
                 <a:solidFill>
                   <a:srgbClr val="000000"/>
                 </a:solidFill>
@@ -5045,7 +4999,7 @@
               </a:rPr>
               <a:t>Key takeaways</a:t>
             </a:r>
-            <a:endParaRPr lang="en-GB" sz="2800" b="0" u="none" strike="noStrike">
+            <a:endParaRPr lang="en-GB" sz="2800" b="0" u="none" strike="noStrike" dirty="0">
               <a:solidFill>
                 <a:srgbClr val="000000"/>
               </a:solidFill>
@@ -5228,87 +5182,15 @@
           </a:p>
         </p:txBody>
       </p:sp>
-      <p:sp>
-        <p:nvSpPr>
-          <p:cNvPr id="90" name="PlaceHolder 2"/>
-          <p:cNvSpPr>
-            <a:spLocks noGrp="1"/>
-          </p:cNvSpPr>
-          <p:nvPr>
-            <p:ph type="sldNum" idx="10"/>
-          </p:nvPr>
-        </p:nvSpPr>
-        <p:spPr>
-          <a:xfrm>
-            <a:off x="4360320" y="4942080"/>
-            <a:ext cx="423000" cy="201240"/>
-          </a:xfrm>
-          <a:prstGeom prst="rect">
-            <a:avLst/>
-          </a:prstGeom>
-          <a:noFill/>
-          <a:ln w="0">
-            <a:noFill/>
-          </a:ln>
-        </p:spPr>
-        <p:txBody>
-          <a:bodyPr lIns="91440" tIns="45720" rIns="91440" bIns="45720" anchor="ctr">
-            <a:noAutofit/>
-          </a:bodyPr>
-          <a:lstStyle>
-            <a:lvl1pPr indent="0" algn="ctr">
-              <a:lnSpc>
-                <a:spcPct val="100000"/>
-              </a:lnSpc>
-              <a:buNone/>
-              <a:defRPr lang="en-GB" sz="1000" b="0" u="none" strike="noStrike">
-                <a:solidFill>
-                  <a:schemeClr val="lt1">
-                    <a:lumMod val="50000"/>
-                  </a:schemeClr>
-                </a:solidFill>
-                <a:effectLst/>
-                <a:uFillTx/>
-                <a:latin typeface="Segoe UI"/>
-                <a:ea typeface="Arial"/>
-              </a:defRPr>
-            </a:lvl1pPr>
-          </a:lstStyle>
-          <a:p>
-            <a:pPr indent="0" algn="ctr">
-              <a:lnSpc>
-                <a:spcPct val="100000"/>
-              </a:lnSpc>
-              <a:buNone/>
-            </a:pPr>
-            <a:fld id="{40DA5761-157A-48F3-9E4F-4CC655FE5145}" type="slidenum">
-              <a:rPr lang="en-GB" sz="1000" b="0" u="none" strike="noStrike">
-                <a:solidFill>
-                  <a:schemeClr val="lt1">
-                    <a:lumMod val="50000"/>
-                  </a:schemeClr>
-                </a:solidFill>
-                <a:effectLst/>
-                <a:uFillTx/>
-                <a:latin typeface="Segoe UI"/>
-                <a:ea typeface="Arial"/>
-              </a:rPr>
-              <a:t>5</a:t>
-            </a:fld>
-            <a:endParaRPr lang="en-GB" sz="1000" b="0" u="none" strike="noStrike">
-              <a:solidFill>
-                <a:srgbClr val="000000"/>
-              </a:solidFill>
-              <a:effectLst/>
-              <a:uFillTx/>
-              <a:latin typeface="Noto Serif"/>
-            </a:endParaRPr>
-          </a:p>
-        </p:txBody>
-      </p:sp>
       <p:pic>
         <p:nvPicPr>
-          <p:cNvPr id="91" name="Image 90"/>
+          <p:cNvPr id="2" name="Picture 6">
+            <a:extLst>
+              <a:ext uri="{FF2B5EF4-FFF2-40B4-BE49-F238E27FC236}">
+                <a16:creationId xmlns:a16="http://schemas.microsoft.com/office/drawing/2014/main" id="{B28239CC-8C6D-E4A7-CB54-B5BC986D2E34}"/>
+              </a:ext>
+            </a:extLst>
+          </p:cNvPr>
           <p:cNvPicPr/>
           <p:nvPr/>
         </p:nvPicPr>
@@ -5318,15 +5200,17 @@
         </p:blipFill>
         <p:spPr>
           <a:xfrm>
-            <a:off x="6167880" y="275760"/>
-            <a:ext cx="2400120" cy="4584240"/>
+            <a:off x="6400868" y="484333"/>
+            <a:ext cx="1975680" cy="3910680"/>
           </a:xfrm>
           <a:prstGeom prst="rect">
             <a:avLst/>
           </a:prstGeom>
           <a:noFill/>
-          <a:ln w="38160">
-            <a:noFill/>
+          <a:ln w="0">
+            <a:solidFill>
+              <a:srgbClr val="777777"/>
+            </a:solidFill>
           </a:ln>
         </p:spPr>
       </p:pic>
